--- a/public/lessons/year-6-maths/spring/week-11/order-fractions/teaching-powerpoint-v1.pptx
+++ b/public/lessons/year-6-maths/spring/week-11/order-fractions/teaching-powerpoint-v1.pptx
@@ -2,24 +2,24 @@
 <file path=ppt/presentation.xml><?xml version="1.0" encoding="utf-8"?>
 <p:presentation xmlns:p="http://schemas.openxmlformats.org/presentationml/2006/main">
   <p:sldMasterIdLst>
-    <p:sldMasterId xmlns:r="http://schemas.openxmlformats.org/officeDocument/2006/relationships" id="2147483648" r:id="Rfde48169f29248a0"/>
+    <p:sldMasterId xmlns:r="http://schemas.openxmlformats.org/officeDocument/2006/relationships" id="2147483648" r:id="Rc02ce62bb55e4cf7"/>
   </p:sldMasterIdLst>
   <p:notesMasterIdLst>
-    <p:notesMasterId xmlns:r="http://schemas.openxmlformats.org/officeDocument/2006/relationships" r:id="R1a49e14801fb415f"/>
+    <p:notesMasterId xmlns:r="http://schemas.openxmlformats.org/officeDocument/2006/relationships" r:id="R3fa4e483ede543f0"/>
   </p:notesMasterIdLst>
   <p:sldIdLst>
-    <p:sldId xmlns:r="http://schemas.openxmlformats.org/officeDocument/2006/relationships" id="256" r:id="Rcace81ec632b44df"/>
-    <p:sldId xmlns:r="http://schemas.openxmlformats.org/officeDocument/2006/relationships" id="257" r:id="R03df65124ba84c08"/>
-    <p:sldId xmlns:r="http://schemas.openxmlformats.org/officeDocument/2006/relationships" id="258" r:id="R41bd5c90c7ad4f92"/>
-    <p:sldId xmlns:r="http://schemas.openxmlformats.org/officeDocument/2006/relationships" id="259" r:id="R5cec9169dfbd4d88"/>
-    <p:sldId xmlns:r="http://schemas.openxmlformats.org/officeDocument/2006/relationships" id="260" r:id="R23dbf85548ae428a"/>
-    <p:sldId xmlns:r="http://schemas.openxmlformats.org/officeDocument/2006/relationships" id="261" r:id="Rff72dd7d9a024701"/>
-    <p:sldId xmlns:r="http://schemas.openxmlformats.org/officeDocument/2006/relationships" id="262" r:id="R5b24d22429524924"/>
-    <p:sldId xmlns:r="http://schemas.openxmlformats.org/officeDocument/2006/relationships" id="263" r:id="R67cff706cb584d95"/>
-    <p:sldId xmlns:r="http://schemas.openxmlformats.org/officeDocument/2006/relationships" id="264" r:id="R7c357562ede2478b"/>
-    <p:sldId xmlns:r="http://schemas.openxmlformats.org/officeDocument/2006/relationships" id="265" r:id="R2304c6607ebf4a10"/>
-    <p:sldId xmlns:r="http://schemas.openxmlformats.org/officeDocument/2006/relationships" id="266" r:id="Rc475986e94904880"/>
-    <p:sldId xmlns:r="http://schemas.openxmlformats.org/officeDocument/2006/relationships" id="267" r:id="R54420e3eef544f4d"/>
+    <p:sldId xmlns:r="http://schemas.openxmlformats.org/officeDocument/2006/relationships" id="256" r:id="R1848cffb11c44013"/>
+    <p:sldId xmlns:r="http://schemas.openxmlformats.org/officeDocument/2006/relationships" id="257" r:id="R00201722efb54f29"/>
+    <p:sldId xmlns:r="http://schemas.openxmlformats.org/officeDocument/2006/relationships" id="258" r:id="R48a2554476834f1b"/>
+    <p:sldId xmlns:r="http://schemas.openxmlformats.org/officeDocument/2006/relationships" id="259" r:id="Ra353adb878e34c95"/>
+    <p:sldId xmlns:r="http://schemas.openxmlformats.org/officeDocument/2006/relationships" id="260" r:id="R190159fae78c4caa"/>
+    <p:sldId xmlns:r="http://schemas.openxmlformats.org/officeDocument/2006/relationships" id="261" r:id="R2c831278f42e4dc1"/>
+    <p:sldId xmlns:r="http://schemas.openxmlformats.org/officeDocument/2006/relationships" id="262" r:id="Re4aa334fc6e04916"/>
+    <p:sldId xmlns:r="http://schemas.openxmlformats.org/officeDocument/2006/relationships" id="263" r:id="Rb96829048f004ef4"/>
+    <p:sldId xmlns:r="http://schemas.openxmlformats.org/officeDocument/2006/relationships" id="264" r:id="R1fd575863f0e47c1"/>
+    <p:sldId xmlns:r="http://schemas.openxmlformats.org/officeDocument/2006/relationships" id="265" r:id="R2630ca06b6bf4d10"/>
+    <p:sldId xmlns:r="http://schemas.openxmlformats.org/officeDocument/2006/relationships" id="266" r:id="R74a24cd298374e4d"/>
+    <p:sldId xmlns:r="http://schemas.openxmlformats.org/officeDocument/2006/relationships" id="267" r:id="R6456181f51ea465f"/>
   </p:sldIdLst>
   <p:sldSz cx="12192000" cy="6858000"/>
   <p:notesSz cx="6858000" cy="9144000"/>
@@ -873,7 +873,7 @@
           <a:lstStyle xmlns:a="http://schemas.openxmlformats.org/drawingml/2006/main"/>
           <a:p xmlns:a="http://schemas.openxmlformats.org/drawingml/2006/main">
             <a:r>
-              <a:t>I do. Reveal the question, setup and each calculation stage one click at a time. Pupils watch before copying. Model answer: 2/3, 3/4, 5/6.</a:t>
+              <a:t>I do. Reveal the question, then reveal each mathematical change one click at a time. Point to the numbers and operation that changed before moving to the next line. Final answer: 2/3, 3/4, 5/6.</a:t>
             </a:r>
           </a:p>
         </p:txBody>
@@ -1291,7 +1291,7 @@
   </p:cSld>
   <p:clrMap bg1="lt1" tx1="dk1" bg2="lt2" tx2="dk2" accent1="accent1" accent2="accent2" accent3="accent3" accent4="accent4" accent5="accent5" accent6="accent6" hlink="hlink" folHlink="folHlink"/>
   <p:sldLayoutIdLst>
-    <p:sldLayoutId xmlns:r="http://schemas.openxmlformats.org/officeDocument/2006/relationships" id="2147483649" r:id="R722a3f7e00f847f9"/>
+    <p:sldLayoutId xmlns:r="http://schemas.openxmlformats.org/officeDocument/2006/relationships" id="2147483649" r:id="R6f5538b317744132"/>
   </p:sldLayoutIdLst>
   <p:txStyles>
     <p:titleStyle>
@@ -1842,7 +1842,7 @@
           <p:cNvPr id="12" name="">
             <a:extLst xmlns:a="http://schemas.openxmlformats.org/drawingml/2006/main">
               <a:ext uri="{FF2B5EF4-FFF2-40B4-BE49-F238E27FC236}">
-                <a16:creationId xmlns:a16="http://schemas.microsoft.com/office/drawing/2014/main" id="{7C1BCDDE-506C-4BCF-8D96-E87A8BA41D78}"/>
+                <a16:creationId xmlns:a16="http://schemas.microsoft.com/office/drawing/2014/main" id="{B66BF368-37DC-4349-98F0-3C8D8CC63F20}"/>
               </a:ext>
             </a:extLst>
           </p:cNvPr>
@@ -1874,7 +1874,7 @@
           <p:cNvPr id="2" name="">
             <a:extLst xmlns:a="http://schemas.openxmlformats.org/drawingml/2006/main">
               <a:ext uri="{FF2B5EF4-FFF2-40B4-BE49-F238E27FC236}">
-                <a16:creationId xmlns:a16="http://schemas.microsoft.com/office/drawing/2014/main" id="{AB48151C-AFC7-48AC-A330-AB4A6B1F9995}"/>
+                <a16:creationId xmlns:a16="http://schemas.microsoft.com/office/drawing/2014/main" id="{9A0B54B9-9472-4ECC-A693-A77F582413DF}"/>
               </a:ext>
             </a:extLst>
           </p:cNvPr>
@@ -1931,7 +1931,7 @@
           <p:cNvPr id="3" name="">
             <a:extLst xmlns:a="http://schemas.openxmlformats.org/drawingml/2006/main">
               <a:ext uri="{FF2B5EF4-FFF2-40B4-BE49-F238E27FC236}">
-                <a16:creationId xmlns:a16="http://schemas.microsoft.com/office/drawing/2014/main" id="{0602F106-C195-40E6-AC23-DA2EAC8343F1}"/>
+                <a16:creationId xmlns:a16="http://schemas.microsoft.com/office/drawing/2014/main" id="{E6CCB51B-62F0-40F8-B5B7-2FECB0A9F682}"/>
               </a:ext>
             </a:extLst>
           </p:cNvPr>
@@ -1965,7 +1965,7 @@
           <p:cNvPr id="4" name="">
             <a:extLst xmlns:a="http://schemas.openxmlformats.org/drawingml/2006/main">
               <a:ext uri="{FF2B5EF4-FFF2-40B4-BE49-F238E27FC236}">
-                <a16:creationId xmlns:a16="http://schemas.microsoft.com/office/drawing/2014/main" id="{8AADC7B7-4E2A-464A-A0BA-E8289049CE84}"/>
+                <a16:creationId xmlns:a16="http://schemas.microsoft.com/office/drawing/2014/main" id="{F75D0228-605A-40FE-9AD3-5EA75C0D031B}"/>
               </a:ext>
             </a:extLst>
           </p:cNvPr>
@@ -2022,7 +2022,7 @@
           <p:cNvPr id="5" name="">
             <a:extLst xmlns:a="http://schemas.openxmlformats.org/drawingml/2006/main">
               <a:ext uri="{FF2B5EF4-FFF2-40B4-BE49-F238E27FC236}">
-                <a16:creationId xmlns:a16="http://schemas.microsoft.com/office/drawing/2014/main" id="{9FE5CC92-72AB-4CF8-8EE4-9761EBB2B2E6}"/>
+                <a16:creationId xmlns:a16="http://schemas.microsoft.com/office/drawing/2014/main" id="{035E0DB1-EAA8-4C89-B9EE-97C92F8EB1FB}"/>
               </a:ext>
             </a:extLst>
           </p:cNvPr>
@@ -2079,7 +2079,7 @@
           <p:cNvPr id="6" name="">
             <a:extLst xmlns:a="http://schemas.openxmlformats.org/drawingml/2006/main">
               <a:ext uri="{FF2B5EF4-FFF2-40B4-BE49-F238E27FC236}">
-                <a16:creationId xmlns:a16="http://schemas.microsoft.com/office/drawing/2014/main" id="{85088B85-B914-4F28-B541-CE04C9133BB6}"/>
+                <a16:creationId xmlns:a16="http://schemas.microsoft.com/office/drawing/2014/main" id="{66904DDF-7CE1-4DD5-9278-E0BBB0F853D7}"/>
               </a:ext>
             </a:extLst>
           </p:cNvPr>
@@ -2113,7 +2113,7 @@
           <p:cNvPr id="7" name="">
             <a:extLst xmlns:a="http://schemas.openxmlformats.org/drawingml/2006/main">
               <a:ext uri="{FF2B5EF4-FFF2-40B4-BE49-F238E27FC236}">
-                <a16:creationId xmlns:a16="http://schemas.microsoft.com/office/drawing/2014/main" id="{2127F1E6-143D-48F7-875A-253F5F6400F0}"/>
+                <a16:creationId xmlns:a16="http://schemas.microsoft.com/office/drawing/2014/main" id="{F9B3D8D6-9CA8-43B9-91E5-A586929F7193}"/>
               </a:ext>
             </a:extLst>
           </p:cNvPr>
@@ -2170,7 +2170,7 @@
           <p:cNvPr id="8" name="">
             <a:extLst xmlns:a="http://schemas.openxmlformats.org/drawingml/2006/main">
               <a:ext uri="{FF2B5EF4-FFF2-40B4-BE49-F238E27FC236}">
-                <a16:creationId xmlns:a16="http://schemas.microsoft.com/office/drawing/2014/main" id="{83CB2F93-0A66-462E-BA62-D698F19498B7}"/>
+                <a16:creationId xmlns:a16="http://schemas.microsoft.com/office/drawing/2014/main" id="{18FB3170-F7EB-4A2F-AABB-2D3AB5380D99}"/>
               </a:ext>
             </a:extLst>
           </p:cNvPr>
@@ -2227,7 +2227,7 @@
           <p:cNvPr id="9" name="">
             <a:extLst xmlns:a="http://schemas.openxmlformats.org/drawingml/2006/main">
               <a:ext uri="{FF2B5EF4-FFF2-40B4-BE49-F238E27FC236}">
-                <a16:creationId xmlns:a16="http://schemas.microsoft.com/office/drawing/2014/main" id="{A4076D94-8348-4CCE-952A-228CAA77A245}"/>
+                <a16:creationId xmlns:a16="http://schemas.microsoft.com/office/drawing/2014/main" id="{A7221881-022D-4239-968F-D9AE4A736C9A}"/>
               </a:ext>
             </a:extLst>
           </p:cNvPr>
@@ -2284,7 +2284,7 @@
           <p:cNvPr id="10" name="">
             <a:extLst xmlns:a="http://schemas.openxmlformats.org/drawingml/2006/main">
               <a:ext uri="{FF2B5EF4-FFF2-40B4-BE49-F238E27FC236}">
-                <a16:creationId xmlns:a16="http://schemas.microsoft.com/office/drawing/2014/main" id="{4D577E6B-D28E-4D0D-A26F-A1D9605E5CE3}"/>
+                <a16:creationId xmlns:a16="http://schemas.microsoft.com/office/drawing/2014/main" id="{431749AC-24D9-4DC7-A04E-48CEDA190F2B}"/>
               </a:ext>
             </a:extLst>
           </p:cNvPr>
@@ -2341,7 +2341,7 @@
           <p:cNvPr id="11" name="">
             <a:extLst xmlns:a="http://schemas.openxmlformats.org/drawingml/2006/main">
               <a:ext uri="{FF2B5EF4-FFF2-40B4-BE49-F238E27FC236}">
-                <a16:creationId xmlns:a16="http://schemas.microsoft.com/office/drawing/2014/main" id="{E2F110BA-FD9B-4B6D-A240-E438BB7A6683}"/>
+                <a16:creationId xmlns:a16="http://schemas.microsoft.com/office/drawing/2014/main" id="{E19A041A-AD2E-4AC8-B6D1-F09D9CF821A7}"/>
               </a:ext>
             </a:extLst>
           </p:cNvPr>
@@ -2396,7 +2396,7 @@
     </p:spTree>
     <p:extLst>
       <p:ext uri="{BB962C8B-B14F-4D97-AF65-F5344CB8AC3E}">
-        <p14:creationId xmlns:p14="http://schemas.microsoft.com/office/powerpoint/2010/main" val="2000812234"/>
+        <p14:creationId xmlns:p14="http://schemas.microsoft.com/office/powerpoint/2010/main" val="176488444"/>
       </p:ext>
     </p:extLst>
   </p:cSld>
@@ -2427,7 +2427,7 @@
           <p:cNvPr id="14" name="">
             <a:extLst xmlns:a="http://schemas.openxmlformats.org/drawingml/2006/main">
               <a:ext uri="{FF2B5EF4-FFF2-40B4-BE49-F238E27FC236}">
-                <a16:creationId xmlns:a16="http://schemas.microsoft.com/office/drawing/2014/main" id="{B736A128-6EC0-4C1A-B28B-2F3757A9C649}"/>
+                <a16:creationId xmlns:a16="http://schemas.microsoft.com/office/drawing/2014/main" id="{21BAEECA-072C-4D32-8814-AD184046F0A0}"/>
               </a:ext>
             </a:extLst>
           </p:cNvPr>
@@ -2459,7 +2459,7 @@
           <p:cNvPr id="2" name="">
             <a:extLst xmlns:a="http://schemas.openxmlformats.org/drawingml/2006/main">
               <a:ext uri="{FF2B5EF4-FFF2-40B4-BE49-F238E27FC236}">
-                <a16:creationId xmlns:a16="http://schemas.microsoft.com/office/drawing/2014/main" id="{F8EB65D2-8A6F-4F93-9BA6-14CBDAFB37E2}"/>
+                <a16:creationId xmlns:a16="http://schemas.microsoft.com/office/drawing/2014/main" id="{9D28552E-FBE7-432A-A93D-CE3F1155DA8B}"/>
               </a:ext>
             </a:extLst>
           </p:cNvPr>
@@ -2516,7 +2516,7 @@
           <p:cNvPr id="3" name="">
             <a:extLst xmlns:a="http://schemas.openxmlformats.org/drawingml/2006/main">
               <a:ext uri="{FF2B5EF4-FFF2-40B4-BE49-F238E27FC236}">
-                <a16:creationId xmlns:a16="http://schemas.microsoft.com/office/drawing/2014/main" id="{B678C084-27D3-46B7-8504-EFB545B95F6D}"/>
+                <a16:creationId xmlns:a16="http://schemas.microsoft.com/office/drawing/2014/main" id="{E01ADE9C-5CC4-4A58-A24C-1165A50994A8}"/>
               </a:ext>
             </a:extLst>
           </p:cNvPr>
@@ -2548,7 +2548,7 @@
           <p:cNvPr id="4" name="">
             <a:extLst xmlns:a="http://schemas.openxmlformats.org/drawingml/2006/main">
               <a:ext uri="{FF2B5EF4-FFF2-40B4-BE49-F238E27FC236}">
-                <a16:creationId xmlns:a16="http://schemas.microsoft.com/office/drawing/2014/main" id="{FBE3F924-5B3B-48AE-A7CF-57A36C6C43A1}"/>
+                <a16:creationId xmlns:a16="http://schemas.microsoft.com/office/drawing/2014/main" id="{C1B2B13B-7731-4EBD-850D-1B91C9C7002E}"/>
               </a:ext>
             </a:extLst>
           </p:cNvPr>
@@ -2605,7 +2605,7 @@
           <p:cNvPr id="5" name="">
             <a:extLst xmlns:a="http://schemas.openxmlformats.org/drawingml/2006/main">
               <a:ext uri="{FF2B5EF4-FFF2-40B4-BE49-F238E27FC236}">
-                <a16:creationId xmlns:a16="http://schemas.microsoft.com/office/drawing/2014/main" id="{9F5596F0-690E-4828-A6BE-BCB5436DA9F7}"/>
+                <a16:creationId xmlns:a16="http://schemas.microsoft.com/office/drawing/2014/main" id="{74A10600-4EC0-4044-8958-415AF6AFF3DF}"/>
               </a:ext>
             </a:extLst>
           </p:cNvPr>
@@ -2662,7 +2662,7 @@
           <p:cNvPr id="6" name="">
             <a:extLst xmlns:a="http://schemas.openxmlformats.org/drawingml/2006/main">
               <a:ext uri="{FF2B5EF4-FFF2-40B4-BE49-F238E27FC236}">
-                <a16:creationId xmlns:a16="http://schemas.microsoft.com/office/drawing/2014/main" id="{720F09B9-7C62-4B12-A70C-57E8E162C058}"/>
+                <a16:creationId xmlns:a16="http://schemas.microsoft.com/office/drawing/2014/main" id="{E46BCFE7-319C-4D79-BEDC-777075B1283D}"/>
               </a:ext>
             </a:extLst>
           </p:cNvPr>
@@ -2719,7 +2719,7 @@
           <p:cNvPr id="7" name="">
             <a:extLst xmlns:a="http://schemas.openxmlformats.org/drawingml/2006/main">
               <a:ext uri="{FF2B5EF4-FFF2-40B4-BE49-F238E27FC236}">
-                <a16:creationId xmlns:a16="http://schemas.microsoft.com/office/drawing/2014/main" id="{209CBCD0-9D5B-449D-ABA8-6EDC2DDD7EA2}"/>
+                <a16:creationId xmlns:a16="http://schemas.microsoft.com/office/drawing/2014/main" id="{C619F543-BD8F-454F-A248-D40C0242CC4B}"/>
               </a:ext>
             </a:extLst>
           </p:cNvPr>
@@ -2751,7 +2751,7 @@
           <p:cNvPr id="8" name="">
             <a:extLst xmlns:a="http://schemas.openxmlformats.org/drawingml/2006/main">
               <a:ext uri="{FF2B5EF4-FFF2-40B4-BE49-F238E27FC236}">
-                <a16:creationId xmlns:a16="http://schemas.microsoft.com/office/drawing/2014/main" id="{AC2A5664-0AE5-4E94-A792-7117A3A2BF10}"/>
+                <a16:creationId xmlns:a16="http://schemas.microsoft.com/office/drawing/2014/main" id="{2ED1C3CF-3A00-4668-AF40-03DB640B5C05}"/>
               </a:ext>
             </a:extLst>
           </p:cNvPr>
@@ -2808,7 +2808,7 @@
           <p:cNvPr id="9" name="">
             <a:extLst xmlns:a="http://schemas.openxmlformats.org/drawingml/2006/main">
               <a:ext uri="{FF2B5EF4-FFF2-40B4-BE49-F238E27FC236}">
-                <a16:creationId xmlns:a16="http://schemas.microsoft.com/office/drawing/2014/main" id="{46A6DB92-6769-46FC-B0EE-62207F4DFC45}"/>
+                <a16:creationId xmlns:a16="http://schemas.microsoft.com/office/drawing/2014/main" id="{0C777CF3-13D1-40EE-9BFE-3C9A1F0E2D24}"/>
               </a:ext>
             </a:extLst>
           </p:cNvPr>
@@ -2865,7 +2865,7 @@
           <p:cNvPr id="10" name="">
             <a:extLst xmlns:a="http://schemas.openxmlformats.org/drawingml/2006/main">
               <a:ext uri="{FF2B5EF4-FFF2-40B4-BE49-F238E27FC236}">
-                <a16:creationId xmlns:a16="http://schemas.microsoft.com/office/drawing/2014/main" id="{47472210-6385-4CA1-B095-0137C26C6956}"/>
+                <a16:creationId xmlns:a16="http://schemas.microsoft.com/office/drawing/2014/main" id="{328C8422-893B-4342-843E-3CB48076503A}"/>
               </a:ext>
             </a:extLst>
           </p:cNvPr>
@@ -2922,7 +2922,7 @@
           <p:cNvPr id="11" name="">
             <a:extLst xmlns:a="http://schemas.openxmlformats.org/drawingml/2006/main">
               <a:ext uri="{FF2B5EF4-FFF2-40B4-BE49-F238E27FC236}">
-                <a16:creationId xmlns:a16="http://schemas.microsoft.com/office/drawing/2014/main" id="{C404D67F-DA35-48FC-9D85-49A0959E8BAA}"/>
+                <a16:creationId xmlns:a16="http://schemas.microsoft.com/office/drawing/2014/main" id="{06332633-3E09-4428-9030-BDA8FCEF68C9}"/>
               </a:ext>
             </a:extLst>
           </p:cNvPr>
@@ -2979,7 +2979,7 @@
           <p:cNvPr id="12" name="">
             <a:extLst xmlns:a="http://schemas.openxmlformats.org/drawingml/2006/main">
               <a:ext uri="{FF2B5EF4-FFF2-40B4-BE49-F238E27FC236}">
-                <a16:creationId xmlns:a16="http://schemas.microsoft.com/office/drawing/2014/main" id="{7A9915EB-B5D5-480B-967E-F4AF049A9B85}"/>
+                <a16:creationId xmlns:a16="http://schemas.microsoft.com/office/drawing/2014/main" id="{BA7432D4-E469-43E5-9737-AED58C4C833B}"/>
               </a:ext>
             </a:extLst>
           </p:cNvPr>
@@ -3036,7 +3036,7 @@
           <p:cNvPr id="13" name="">
             <a:extLst xmlns:a="http://schemas.openxmlformats.org/drawingml/2006/main">
               <a:ext uri="{FF2B5EF4-FFF2-40B4-BE49-F238E27FC236}">
-                <a16:creationId xmlns:a16="http://schemas.microsoft.com/office/drawing/2014/main" id="{F64D792B-F5A1-4956-AC49-3C214B8A45F7}"/>
+                <a16:creationId xmlns:a16="http://schemas.microsoft.com/office/drawing/2014/main" id="{BF52325C-83A4-47AB-8EB3-7B125D64C80A}"/>
               </a:ext>
             </a:extLst>
           </p:cNvPr>
@@ -3091,7 +3091,7 @@
     </p:spTree>
     <p:extLst>
       <p:ext uri="{BB962C8B-B14F-4D97-AF65-F5344CB8AC3E}">
-        <p14:creationId xmlns:p14="http://schemas.microsoft.com/office/powerpoint/2010/main" val="722022419"/>
+        <p14:creationId xmlns:p14="http://schemas.microsoft.com/office/powerpoint/2010/main" val="26298177"/>
       </p:ext>
     </p:extLst>
   </p:cSld>
@@ -3292,7 +3292,7 @@
           <p:cNvPr id="19" name="">
             <a:extLst xmlns:a="http://schemas.openxmlformats.org/drawingml/2006/main">
               <a:ext uri="{FF2B5EF4-FFF2-40B4-BE49-F238E27FC236}">
-                <a16:creationId xmlns:a16="http://schemas.microsoft.com/office/drawing/2014/main" id="{6DDEE91F-8349-4DA8-BD8E-5705FFED01E0}"/>
+                <a16:creationId xmlns:a16="http://schemas.microsoft.com/office/drawing/2014/main" id="{C6C0D431-83BD-4975-B861-9B0FDA1ADCCB}"/>
               </a:ext>
             </a:extLst>
           </p:cNvPr>
@@ -3324,7 +3324,7 @@
           <p:cNvPr id="2" name="">
             <a:extLst xmlns:a="http://schemas.openxmlformats.org/drawingml/2006/main">
               <a:ext uri="{FF2B5EF4-FFF2-40B4-BE49-F238E27FC236}">
-                <a16:creationId xmlns:a16="http://schemas.microsoft.com/office/drawing/2014/main" id="{77C658C3-1C61-4DA4-ABEF-2D855F196C9B}"/>
+                <a16:creationId xmlns:a16="http://schemas.microsoft.com/office/drawing/2014/main" id="{085695CE-36CF-4E4A-8229-0BA733FD9D62}"/>
               </a:ext>
             </a:extLst>
           </p:cNvPr>
@@ -3381,7 +3381,7 @@
           <p:cNvPr id="3" name="">
             <a:extLst xmlns:a="http://schemas.openxmlformats.org/drawingml/2006/main">
               <a:ext uri="{FF2B5EF4-FFF2-40B4-BE49-F238E27FC236}">
-                <a16:creationId xmlns:a16="http://schemas.microsoft.com/office/drawing/2014/main" id="{33E19362-6525-4EDC-862E-59DB835FAB5B}"/>
+                <a16:creationId xmlns:a16="http://schemas.microsoft.com/office/drawing/2014/main" id="{7F66DDEE-254C-47F2-BF53-828B04006397}"/>
               </a:ext>
             </a:extLst>
           </p:cNvPr>
@@ -3413,7 +3413,7 @@
           <p:cNvPr id="4" name="">
             <a:extLst xmlns:a="http://schemas.openxmlformats.org/drawingml/2006/main">
               <a:ext uri="{FF2B5EF4-FFF2-40B4-BE49-F238E27FC236}">
-                <a16:creationId xmlns:a16="http://schemas.microsoft.com/office/drawing/2014/main" id="{40FE2E4D-81F6-4E0B-AAAB-394D575B4EBB}"/>
+                <a16:creationId xmlns:a16="http://schemas.microsoft.com/office/drawing/2014/main" id="{C0276247-E4E2-48AB-AD00-677DE42D6B70}"/>
               </a:ext>
             </a:extLst>
           </p:cNvPr>
@@ -3470,7 +3470,7 @@
           <p:cNvPr id="5" name="">
             <a:extLst xmlns:a="http://schemas.openxmlformats.org/drawingml/2006/main">
               <a:ext uri="{FF2B5EF4-FFF2-40B4-BE49-F238E27FC236}">
-                <a16:creationId xmlns:a16="http://schemas.microsoft.com/office/drawing/2014/main" id="{C34F0C33-004C-474B-B444-D3567EE9E018}"/>
+                <a16:creationId xmlns:a16="http://schemas.microsoft.com/office/drawing/2014/main" id="{1426AE48-E04F-4A0A-9E73-A2B109AA8CA5}"/>
               </a:ext>
             </a:extLst>
           </p:cNvPr>
@@ -3527,7 +3527,7 @@
           <p:cNvPr id="6" name="">
             <a:extLst xmlns:a="http://schemas.openxmlformats.org/drawingml/2006/main">
               <a:ext uri="{FF2B5EF4-FFF2-40B4-BE49-F238E27FC236}">
-                <a16:creationId xmlns:a16="http://schemas.microsoft.com/office/drawing/2014/main" id="{7664E73C-B10B-40BC-B950-8D3AFCA0DC22}"/>
+                <a16:creationId xmlns:a16="http://schemas.microsoft.com/office/drawing/2014/main" id="{7D14F0B6-5FC4-46E7-BFF1-E603C380E53C}"/>
               </a:ext>
             </a:extLst>
           </p:cNvPr>
@@ -3584,7 +3584,7 @@
           <p:cNvPr id="7" name="">
             <a:extLst xmlns:a="http://schemas.openxmlformats.org/drawingml/2006/main">
               <a:ext uri="{FF2B5EF4-FFF2-40B4-BE49-F238E27FC236}">
-                <a16:creationId xmlns:a16="http://schemas.microsoft.com/office/drawing/2014/main" id="{FFF44430-133A-4B1D-966C-A3745A991FBE}"/>
+                <a16:creationId xmlns:a16="http://schemas.microsoft.com/office/drawing/2014/main" id="{7FA53AEC-EBAE-40B3-8E9A-77DC49E41B74}"/>
               </a:ext>
             </a:extLst>
           </p:cNvPr>
@@ -3616,7 +3616,7 @@
           <p:cNvPr id="8" name="">
             <a:extLst xmlns:a="http://schemas.openxmlformats.org/drawingml/2006/main">
               <a:ext uri="{FF2B5EF4-FFF2-40B4-BE49-F238E27FC236}">
-                <a16:creationId xmlns:a16="http://schemas.microsoft.com/office/drawing/2014/main" id="{23BB5185-1A45-4AB5-AA9A-BE9E0D53904D}"/>
+                <a16:creationId xmlns:a16="http://schemas.microsoft.com/office/drawing/2014/main" id="{8962BFDE-69DA-46F3-BB79-99131ED7D021}"/>
               </a:ext>
             </a:extLst>
           </p:cNvPr>
@@ -3673,7 +3673,7 @@
           <p:cNvPr id="9" name="">
             <a:extLst xmlns:a="http://schemas.openxmlformats.org/drawingml/2006/main">
               <a:ext uri="{FF2B5EF4-FFF2-40B4-BE49-F238E27FC236}">
-                <a16:creationId xmlns:a16="http://schemas.microsoft.com/office/drawing/2014/main" id="{D49E587A-3F0F-4C54-B597-74E0305D34A0}"/>
+                <a16:creationId xmlns:a16="http://schemas.microsoft.com/office/drawing/2014/main" id="{E064DAD6-14E3-4FBA-880E-CCD49CF1EBBE}"/>
               </a:ext>
             </a:extLst>
           </p:cNvPr>
@@ -3730,7 +3730,7 @@
           <p:cNvPr id="10" name="">
             <a:extLst xmlns:a="http://schemas.openxmlformats.org/drawingml/2006/main">
               <a:ext uri="{FF2B5EF4-FFF2-40B4-BE49-F238E27FC236}">
-                <a16:creationId xmlns:a16="http://schemas.microsoft.com/office/drawing/2014/main" id="{F4D9E708-FC74-4037-BF58-BC11715D5314}"/>
+                <a16:creationId xmlns:a16="http://schemas.microsoft.com/office/drawing/2014/main" id="{D41B362F-1190-4EF3-879F-194C847D3180}"/>
               </a:ext>
             </a:extLst>
           </p:cNvPr>
@@ -3787,7 +3787,7 @@
           <p:cNvPr id="11" name="">
             <a:extLst xmlns:a="http://schemas.openxmlformats.org/drawingml/2006/main">
               <a:ext uri="{FF2B5EF4-FFF2-40B4-BE49-F238E27FC236}">
-                <a16:creationId xmlns:a16="http://schemas.microsoft.com/office/drawing/2014/main" id="{20863725-0753-407D-89E1-F97FD4BC1166}"/>
+                <a16:creationId xmlns:a16="http://schemas.microsoft.com/office/drawing/2014/main" id="{59BCAE16-CF98-415E-A391-F3622069E132}"/>
               </a:ext>
             </a:extLst>
           </p:cNvPr>
@@ -3821,7 +3821,7 @@
           <p:cNvPr id="12" name="">
             <a:extLst xmlns:a="http://schemas.openxmlformats.org/drawingml/2006/main">
               <a:ext uri="{FF2B5EF4-FFF2-40B4-BE49-F238E27FC236}">
-                <a16:creationId xmlns:a16="http://schemas.microsoft.com/office/drawing/2014/main" id="{0AB2B263-908B-4DC6-8201-F280855F6BB4}"/>
+                <a16:creationId xmlns:a16="http://schemas.microsoft.com/office/drawing/2014/main" id="{B7C5AB51-E611-499D-9D0B-9136DA57A067}"/>
               </a:ext>
             </a:extLst>
           </p:cNvPr>
@@ -3878,7 +3878,7 @@
           <p:cNvPr id="13" name="">
             <a:extLst xmlns:a="http://schemas.openxmlformats.org/drawingml/2006/main">
               <a:ext uri="{FF2B5EF4-FFF2-40B4-BE49-F238E27FC236}">
-                <a16:creationId xmlns:a16="http://schemas.microsoft.com/office/drawing/2014/main" id="{B7514807-8A90-4F42-9126-5DBAF3F46E81}"/>
+                <a16:creationId xmlns:a16="http://schemas.microsoft.com/office/drawing/2014/main" id="{4957E387-7155-4563-9DEA-56A8F900A7B9}"/>
               </a:ext>
             </a:extLst>
           </p:cNvPr>
@@ -3935,7 +3935,7 @@
           <p:cNvPr id="14" name="">
             <a:extLst xmlns:a="http://schemas.openxmlformats.org/drawingml/2006/main">
               <a:ext uri="{FF2B5EF4-FFF2-40B4-BE49-F238E27FC236}">
-                <a16:creationId xmlns:a16="http://schemas.microsoft.com/office/drawing/2014/main" id="{A72571EC-CFE3-4C10-85CF-A8C463C5446C}"/>
+                <a16:creationId xmlns:a16="http://schemas.microsoft.com/office/drawing/2014/main" id="{E173C81D-C739-47F9-A71F-2BBB3BE7D76B}"/>
               </a:ext>
             </a:extLst>
           </p:cNvPr>
@@ -3992,7 +3992,7 @@
           <p:cNvPr id="15" name="">
             <a:extLst xmlns:a="http://schemas.openxmlformats.org/drawingml/2006/main">
               <a:ext uri="{FF2B5EF4-FFF2-40B4-BE49-F238E27FC236}">
-                <a16:creationId xmlns:a16="http://schemas.microsoft.com/office/drawing/2014/main" id="{E5E640DB-4391-43A4-817D-4A01C6F4DCDC}"/>
+                <a16:creationId xmlns:a16="http://schemas.microsoft.com/office/drawing/2014/main" id="{167D091C-4CF7-47E9-8121-622067642544}"/>
               </a:ext>
             </a:extLst>
           </p:cNvPr>
@@ -4026,7 +4026,7 @@
           <p:cNvPr id="16" name="">
             <a:extLst xmlns:a="http://schemas.openxmlformats.org/drawingml/2006/main">
               <a:ext uri="{FF2B5EF4-FFF2-40B4-BE49-F238E27FC236}">
-                <a16:creationId xmlns:a16="http://schemas.microsoft.com/office/drawing/2014/main" id="{7A2C2F6D-0487-4BA2-A34E-F20A54CF4DC0}"/>
+                <a16:creationId xmlns:a16="http://schemas.microsoft.com/office/drawing/2014/main" id="{0550B944-3DD8-443C-B8E8-076B57F7E208}"/>
               </a:ext>
             </a:extLst>
           </p:cNvPr>
@@ -4083,7 +4083,7 @@
           <p:cNvPr id="17" name="">
             <a:extLst xmlns:a="http://schemas.openxmlformats.org/drawingml/2006/main">
               <a:ext uri="{FF2B5EF4-FFF2-40B4-BE49-F238E27FC236}">
-                <a16:creationId xmlns:a16="http://schemas.microsoft.com/office/drawing/2014/main" id="{CBD3A475-8212-4523-885E-8BA9D23A7A47}"/>
+                <a16:creationId xmlns:a16="http://schemas.microsoft.com/office/drawing/2014/main" id="{8ACC5E80-41F5-44A6-A427-043F398ACE1A}"/>
               </a:ext>
             </a:extLst>
           </p:cNvPr>
@@ -4140,7 +4140,7 @@
           <p:cNvPr id="18" name="">
             <a:extLst xmlns:a="http://schemas.openxmlformats.org/drawingml/2006/main">
               <a:ext uri="{FF2B5EF4-FFF2-40B4-BE49-F238E27FC236}">
-                <a16:creationId xmlns:a16="http://schemas.microsoft.com/office/drawing/2014/main" id="{CFE675EF-BFF9-46A1-B71E-DF259205E187}"/>
+                <a16:creationId xmlns:a16="http://schemas.microsoft.com/office/drawing/2014/main" id="{5BA9CA7D-E3A5-4F10-9350-23259C1632BA}"/>
               </a:ext>
             </a:extLst>
           </p:cNvPr>
@@ -4195,7 +4195,7 @@
     </p:spTree>
     <p:extLst>
       <p:ext uri="{BB962C8B-B14F-4D97-AF65-F5344CB8AC3E}">
-        <p14:creationId xmlns:p14="http://schemas.microsoft.com/office/powerpoint/2010/main" val="1150511325"/>
+        <p14:creationId xmlns:p14="http://schemas.microsoft.com/office/powerpoint/2010/main" val="1332172187"/>
       </p:ext>
     </p:extLst>
   </p:cSld>
@@ -4350,7 +4350,7 @@
           <p:cNvPr id="23" name="">
             <a:extLst xmlns:a="http://schemas.openxmlformats.org/drawingml/2006/main">
               <a:ext uri="{FF2B5EF4-FFF2-40B4-BE49-F238E27FC236}">
-                <a16:creationId xmlns:a16="http://schemas.microsoft.com/office/drawing/2014/main" id="{3AC90644-8105-4D3F-8691-B8BFFDA12901}"/>
+                <a16:creationId xmlns:a16="http://schemas.microsoft.com/office/drawing/2014/main" id="{8B1A2FA8-13BE-45FE-879E-CB33539DED2D}"/>
               </a:ext>
             </a:extLst>
           </p:cNvPr>
@@ -4382,7 +4382,7 @@
           <p:cNvPr id="2" name="">
             <a:extLst xmlns:a="http://schemas.openxmlformats.org/drawingml/2006/main">
               <a:ext uri="{FF2B5EF4-FFF2-40B4-BE49-F238E27FC236}">
-                <a16:creationId xmlns:a16="http://schemas.microsoft.com/office/drawing/2014/main" id="{8F67C199-BCE3-4A76-BC58-CE14A71D72C2}"/>
+                <a16:creationId xmlns:a16="http://schemas.microsoft.com/office/drawing/2014/main" id="{1E012B11-8718-4F2B-86FA-4B4918F21EC0}"/>
               </a:ext>
             </a:extLst>
           </p:cNvPr>
@@ -4439,7 +4439,7 @@
           <p:cNvPr id="3" name="">
             <a:extLst xmlns:a="http://schemas.openxmlformats.org/drawingml/2006/main">
               <a:ext uri="{FF2B5EF4-FFF2-40B4-BE49-F238E27FC236}">
-                <a16:creationId xmlns:a16="http://schemas.microsoft.com/office/drawing/2014/main" id="{C00ECAD8-2F05-4DE5-AD8C-F19FFC339C52}"/>
+                <a16:creationId xmlns:a16="http://schemas.microsoft.com/office/drawing/2014/main" id="{85FAA8EB-766F-4536-ACFB-88AE094D889B}"/>
               </a:ext>
             </a:extLst>
           </p:cNvPr>
@@ -4471,7 +4471,7 @@
           <p:cNvPr id="4" name="">
             <a:extLst xmlns:a="http://schemas.openxmlformats.org/drawingml/2006/main">
               <a:ext uri="{FF2B5EF4-FFF2-40B4-BE49-F238E27FC236}">
-                <a16:creationId xmlns:a16="http://schemas.microsoft.com/office/drawing/2014/main" id="{F4667597-AFCB-436E-9437-4EB8A0049E37}"/>
+                <a16:creationId xmlns:a16="http://schemas.microsoft.com/office/drawing/2014/main" id="{DE48D25D-7191-4D83-8EAA-07804A20D25F}"/>
               </a:ext>
             </a:extLst>
           </p:cNvPr>
@@ -4528,7 +4528,7 @@
           <p:cNvPr id="5" name="">
             <a:extLst xmlns:a="http://schemas.openxmlformats.org/drawingml/2006/main">
               <a:ext uri="{FF2B5EF4-FFF2-40B4-BE49-F238E27FC236}">
-                <a16:creationId xmlns:a16="http://schemas.microsoft.com/office/drawing/2014/main" id="{D8FD5415-69BB-42F7-B602-E0395B61BD85}"/>
+                <a16:creationId xmlns:a16="http://schemas.microsoft.com/office/drawing/2014/main" id="{969829FB-5A6F-4F42-8729-CFE77DB0D973}"/>
               </a:ext>
             </a:extLst>
           </p:cNvPr>
@@ -4585,7 +4585,7 @@
           <p:cNvPr id="6" name="">
             <a:extLst xmlns:a="http://schemas.openxmlformats.org/drawingml/2006/main">
               <a:ext uri="{FF2B5EF4-FFF2-40B4-BE49-F238E27FC236}">
-                <a16:creationId xmlns:a16="http://schemas.microsoft.com/office/drawing/2014/main" id="{A29AA815-9528-4115-8CBB-F4970B06DEDF}"/>
+                <a16:creationId xmlns:a16="http://schemas.microsoft.com/office/drawing/2014/main" id="{5FE33526-1FCA-4B56-9587-12989786BDFD}"/>
               </a:ext>
             </a:extLst>
           </p:cNvPr>
@@ -4642,7 +4642,7 @@
           <p:cNvPr id="7" name="">
             <a:extLst xmlns:a="http://schemas.openxmlformats.org/drawingml/2006/main">
               <a:ext uri="{FF2B5EF4-FFF2-40B4-BE49-F238E27FC236}">
-                <a16:creationId xmlns:a16="http://schemas.microsoft.com/office/drawing/2014/main" id="{5A76E50B-8E7E-4BE9-919C-584D90FFBF16}"/>
+                <a16:creationId xmlns:a16="http://schemas.microsoft.com/office/drawing/2014/main" id="{3E0F0831-14EE-4F21-AB2E-EBA4C1A235CB}"/>
               </a:ext>
             </a:extLst>
           </p:cNvPr>
@@ -4674,7 +4674,7 @@
           <p:cNvPr id="8" name="">
             <a:extLst xmlns:a="http://schemas.openxmlformats.org/drawingml/2006/main">
               <a:ext uri="{FF2B5EF4-FFF2-40B4-BE49-F238E27FC236}">
-                <a16:creationId xmlns:a16="http://schemas.microsoft.com/office/drawing/2014/main" id="{752293C3-B4E8-4672-860B-C6FCD440F93D}"/>
+                <a16:creationId xmlns:a16="http://schemas.microsoft.com/office/drawing/2014/main" id="{D59DDFB4-7428-4977-9C15-E93CCC6A2420}"/>
               </a:ext>
             </a:extLst>
           </p:cNvPr>
@@ -4731,7 +4731,7 @@
           <p:cNvPr id="9" name="">
             <a:extLst xmlns:a="http://schemas.openxmlformats.org/drawingml/2006/main">
               <a:ext uri="{FF2B5EF4-FFF2-40B4-BE49-F238E27FC236}">
-                <a16:creationId xmlns:a16="http://schemas.microsoft.com/office/drawing/2014/main" id="{B4D77DF2-1900-4C11-AD9E-FF4D8BE5BA83}"/>
+                <a16:creationId xmlns:a16="http://schemas.microsoft.com/office/drawing/2014/main" id="{54D79416-49EB-413F-B00D-2C4202DA557C}"/>
               </a:ext>
             </a:extLst>
           </p:cNvPr>
@@ -4788,7 +4788,7 @@
           <p:cNvPr id="10" name="">
             <a:extLst xmlns:a="http://schemas.openxmlformats.org/drawingml/2006/main">
               <a:ext uri="{FF2B5EF4-FFF2-40B4-BE49-F238E27FC236}">
-                <a16:creationId xmlns:a16="http://schemas.microsoft.com/office/drawing/2014/main" id="{015B4F5F-EE58-47ED-ABCA-B1B667209371}"/>
+                <a16:creationId xmlns:a16="http://schemas.microsoft.com/office/drawing/2014/main" id="{A6B97AB6-5893-4017-B26B-41E6DF12B556}"/>
               </a:ext>
             </a:extLst>
           </p:cNvPr>
@@ -4822,7 +4822,7 @@
           <p:cNvPr id="11" name="">
             <a:extLst xmlns:a="http://schemas.openxmlformats.org/drawingml/2006/main">
               <a:ext uri="{FF2B5EF4-FFF2-40B4-BE49-F238E27FC236}">
-                <a16:creationId xmlns:a16="http://schemas.microsoft.com/office/drawing/2014/main" id="{33171723-EE62-48B2-B8D5-42B30888CE2C}"/>
+                <a16:creationId xmlns:a16="http://schemas.microsoft.com/office/drawing/2014/main" id="{67691464-3BE6-4224-A774-B29A8EEC566A}"/>
               </a:ext>
             </a:extLst>
           </p:cNvPr>
@@ -4854,7 +4854,7 @@
           <p:cNvPr id="12" name="">
             <a:extLst xmlns:a="http://schemas.openxmlformats.org/drawingml/2006/main">
               <a:ext uri="{FF2B5EF4-FFF2-40B4-BE49-F238E27FC236}">
-                <a16:creationId xmlns:a16="http://schemas.microsoft.com/office/drawing/2014/main" id="{624A0729-EE82-4E48-8383-7BB6B89DB0B1}"/>
+                <a16:creationId xmlns:a16="http://schemas.microsoft.com/office/drawing/2014/main" id="{216638EB-1896-40C1-83F1-32C4A12DDEBF}"/>
               </a:ext>
             </a:extLst>
           </p:cNvPr>
@@ -4911,7 +4911,7 @@
           <p:cNvPr id="13" name="">
             <a:extLst xmlns:a="http://schemas.openxmlformats.org/drawingml/2006/main">
               <a:ext uri="{FF2B5EF4-FFF2-40B4-BE49-F238E27FC236}">
-                <a16:creationId xmlns:a16="http://schemas.microsoft.com/office/drawing/2014/main" id="{587A2955-F18E-4AAE-8109-BB8F46CD6A13}"/>
+                <a16:creationId xmlns:a16="http://schemas.microsoft.com/office/drawing/2014/main" id="{E33AFE28-5741-432B-8F1E-2FB95734067E}"/>
               </a:ext>
             </a:extLst>
           </p:cNvPr>
@@ -4968,7 +4968,7 @@
           <p:cNvPr id="14" name="">
             <a:extLst xmlns:a="http://schemas.openxmlformats.org/drawingml/2006/main">
               <a:ext uri="{FF2B5EF4-FFF2-40B4-BE49-F238E27FC236}">
-                <a16:creationId xmlns:a16="http://schemas.microsoft.com/office/drawing/2014/main" id="{C6F7CFF6-025A-40C1-BED0-D35C153987BE}"/>
+                <a16:creationId xmlns:a16="http://schemas.microsoft.com/office/drawing/2014/main" id="{5FD1A035-B79B-4705-B8AE-5CA04F4E3A8D}"/>
               </a:ext>
             </a:extLst>
           </p:cNvPr>
@@ -5002,7 +5002,7 @@
           <p:cNvPr id="15" name="">
             <a:extLst xmlns:a="http://schemas.openxmlformats.org/drawingml/2006/main">
               <a:ext uri="{FF2B5EF4-FFF2-40B4-BE49-F238E27FC236}">
-                <a16:creationId xmlns:a16="http://schemas.microsoft.com/office/drawing/2014/main" id="{0C1BC972-727A-4969-9B56-01221783376E}"/>
+                <a16:creationId xmlns:a16="http://schemas.microsoft.com/office/drawing/2014/main" id="{B1BCEB7F-A816-488D-A5DE-4619B791DE76}"/>
               </a:ext>
             </a:extLst>
           </p:cNvPr>
@@ -5034,7 +5034,7 @@
           <p:cNvPr id="16" name="">
             <a:extLst xmlns:a="http://schemas.openxmlformats.org/drawingml/2006/main">
               <a:ext uri="{FF2B5EF4-FFF2-40B4-BE49-F238E27FC236}">
-                <a16:creationId xmlns:a16="http://schemas.microsoft.com/office/drawing/2014/main" id="{1D8CE078-8A22-4368-91EC-DC7814796E28}"/>
+                <a16:creationId xmlns:a16="http://schemas.microsoft.com/office/drawing/2014/main" id="{4929CA10-982E-454E-AEA5-B3BFCB418843}"/>
               </a:ext>
             </a:extLst>
           </p:cNvPr>
@@ -5091,7 +5091,7 @@
           <p:cNvPr id="17" name="">
             <a:extLst xmlns:a="http://schemas.openxmlformats.org/drawingml/2006/main">
               <a:ext uri="{FF2B5EF4-FFF2-40B4-BE49-F238E27FC236}">
-                <a16:creationId xmlns:a16="http://schemas.microsoft.com/office/drawing/2014/main" id="{E9011B83-3D33-4A34-9065-5C6ED58F9649}"/>
+                <a16:creationId xmlns:a16="http://schemas.microsoft.com/office/drawing/2014/main" id="{9B19F6AB-BF44-4906-AA19-6447A4C0B20E}"/>
               </a:ext>
             </a:extLst>
           </p:cNvPr>
@@ -5148,7 +5148,7 @@
           <p:cNvPr id="18" name="">
             <a:extLst xmlns:a="http://schemas.openxmlformats.org/drawingml/2006/main">
               <a:ext uri="{FF2B5EF4-FFF2-40B4-BE49-F238E27FC236}">
-                <a16:creationId xmlns:a16="http://schemas.microsoft.com/office/drawing/2014/main" id="{C340FB3D-3474-484C-B68D-644D90D3471A}"/>
+                <a16:creationId xmlns:a16="http://schemas.microsoft.com/office/drawing/2014/main" id="{7863EF0C-CEBD-4179-955F-72C21F901114}"/>
               </a:ext>
             </a:extLst>
           </p:cNvPr>
@@ -5182,7 +5182,7 @@
           <p:cNvPr id="19" name="">
             <a:extLst xmlns:a="http://schemas.openxmlformats.org/drawingml/2006/main">
               <a:ext uri="{FF2B5EF4-FFF2-40B4-BE49-F238E27FC236}">
-                <a16:creationId xmlns:a16="http://schemas.microsoft.com/office/drawing/2014/main" id="{2A34F988-2B73-46F0-87A4-0D7B9D9A56F8}"/>
+                <a16:creationId xmlns:a16="http://schemas.microsoft.com/office/drawing/2014/main" id="{E6267C80-3545-4073-B2BF-24E974BF71A4}"/>
               </a:ext>
             </a:extLst>
           </p:cNvPr>
@@ -5214,7 +5214,7 @@
           <p:cNvPr id="20" name="">
             <a:extLst xmlns:a="http://schemas.openxmlformats.org/drawingml/2006/main">
               <a:ext uri="{FF2B5EF4-FFF2-40B4-BE49-F238E27FC236}">
-                <a16:creationId xmlns:a16="http://schemas.microsoft.com/office/drawing/2014/main" id="{F302EA75-598E-4462-AC7F-2F22866CFBC0}"/>
+                <a16:creationId xmlns:a16="http://schemas.microsoft.com/office/drawing/2014/main" id="{B042B768-8C97-4CE1-B198-5007BA1D828E}"/>
               </a:ext>
             </a:extLst>
           </p:cNvPr>
@@ -5271,7 +5271,7 @@
           <p:cNvPr id="21" name="">
             <a:extLst xmlns:a="http://schemas.openxmlformats.org/drawingml/2006/main">
               <a:ext uri="{FF2B5EF4-FFF2-40B4-BE49-F238E27FC236}">
-                <a16:creationId xmlns:a16="http://schemas.microsoft.com/office/drawing/2014/main" id="{1141F1AA-9963-4C08-93B9-7A6F1EABA065}"/>
+                <a16:creationId xmlns:a16="http://schemas.microsoft.com/office/drawing/2014/main" id="{0FF78C53-12D8-4734-B605-B0FC5C70C0DA}"/>
               </a:ext>
             </a:extLst>
           </p:cNvPr>
@@ -5328,7 +5328,7 @@
           <p:cNvPr id="22" name="">
             <a:extLst xmlns:a="http://schemas.openxmlformats.org/drawingml/2006/main">
               <a:ext uri="{FF2B5EF4-FFF2-40B4-BE49-F238E27FC236}">
-                <a16:creationId xmlns:a16="http://schemas.microsoft.com/office/drawing/2014/main" id="{03707751-C519-47E6-A7BB-0ABFF0C0B3A5}"/>
+                <a16:creationId xmlns:a16="http://schemas.microsoft.com/office/drawing/2014/main" id="{8E53DEE9-20B0-4C80-B5E3-44E7F929CEFD}"/>
               </a:ext>
             </a:extLst>
           </p:cNvPr>
@@ -5383,7 +5383,7 @@
     </p:spTree>
     <p:extLst>
       <p:ext uri="{BB962C8B-B14F-4D97-AF65-F5344CB8AC3E}">
-        <p14:creationId xmlns:p14="http://schemas.microsoft.com/office/powerpoint/2010/main" val="570081436"/>
+        <p14:creationId xmlns:p14="http://schemas.microsoft.com/office/powerpoint/2010/main" val="1142349845"/>
       </p:ext>
     </p:extLst>
   </p:cSld>
@@ -5584,7 +5584,7 @@
           <p:cNvPr id="23" name="">
             <a:extLst xmlns:a="http://schemas.openxmlformats.org/drawingml/2006/main">
               <a:ext uri="{FF2B5EF4-FFF2-40B4-BE49-F238E27FC236}">
-                <a16:creationId xmlns:a16="http://schemas.microsoft.com/office/drawing/2014/main" id="{494A7AB5-1DA6-4775-B044-DDA484FE10B9}"/>
+                <a16:creationId xmlns:a16="http://schemas.microsoft.com/office/drawing/2014/main" id="{08BD16FB-1842-4F01-AB8D-5C48F99959BF}"/>
               </a:ext>
             </a:extLst>
           </p:cNvPr>
@@ -5616,7 +5616,7 @@
           <p:cNvPr id="2" name="">
             <a:extLst xmlns:a="http://schemas.openxmlformats.org/drawingml/2006/main">
               <a:ext uri="{FF2B5EF4-FFF2-40B4-BE49-F238E27FC236}">
-                <a16:creationId xmlns:a16="http://schemas.microsoft.com/office/drawing/2014/main" id="{4FD3381E-36BB-4BDF-8A44-BE952002D294}"/>
+                <a16:creationId xmlns:a16="http://schemas.microsoft.com/office/drawing/2014/main" id="{66E81497-5304-4908-830B-2A39F048C0D7}"/>
               </a:ext>
             </a:extLst>
           </p:cNvPr>
@@ -5673,7 +5673,7 @@
           <p:cNvPr id="3" name="">
             <a:extLst xmlns:a="http://schemas.openxmlformats.org/drawingml/2006/main">
               <a:ext uri="{FF2B5EF4-FFF2-40B4-BE49-F238E27FC236}">
-                <a16:creationId xmlns:a16="http://schemas.microsoft.com/office/drawing/2014/main" id="{97F5444F-6EED-4EDF-9902-6C1277899016}"/>
+                <a16:creationId xmlns:a16="http://schemas.microsoft.com/office/drawing/2014/main" id="{1C22437C-BF29-466B-BF56-9E67C6BA90FA}"/>
               </a:ext>
             </a:extLst>
           </p:cNvPr>
@@ -5705,7 +5705,7 @@
           <p:cNvPr id="4" name="">
             <a:extLst xmlns:a="http://schemas.openxmlformats.org/drawingml/2006/main">
               <a:ext uri="{FF2B5EF4-FFF2-40B4-BE49-F238E27FC236}">
-                <a16:creationId xmlns:a16="http://schemas.microsoft.com/office/drawing/2014/main" id="{44E95D1B-3666-4647-A2D0-6971B3E2227B}"/>
+                <a16:creationId xmlns:a16="http://schemas.microsoft.com/office/drawing/2014/main" id="{0C1858BC-9D92-4798-939C-A560C5DDCAAD}"/>
               </a:ext>
             </a:extLst>
           </p:cNvPr>
@@ -5762,7 +5762,7 @@
           <p:cNvPr id="5" name="">
             <a:extLst xmlns:a="http://schemas.openxmlformats.org/drawingml/2006/main">
               <a:ext uri="{FF2B5EF4-FFF2-40B4-BE49-F238E27FC236}">
-                <a16:creationId xmlns:a16="http://schemas.microsoft.com/office/drawing/2014/main" id="{C2471E73-D6DF-449D-B002-BEBE83A707C0}"/>
+                <a16:creationId xmlns:a16="http://schemas.microsoft.com/office/drawing/2014/main" id="{3D7F046B-9DB9-4BCE-8B3F-AC1185D01638}"/>
               </a:ext>
             </a:extLst>
           </p:cNvPr>
@@ -5819,7 +5819,7 @@
           <p:cNvPr id="6" name="">
             <a:extLst xmlns:a="http://schemas.openxmlformats.org/drawingml/2006/main">
               <a:ext uri="{FF2B5EF4-FFF2-40B4-BE49-F238E27FC236}">
-                <a16:creationId xmlns:a16="http://schemas.microsoft.com/office/drawing/2014/main" id="{88B70531-F81B-46F6-B38C-C3F373086E41}"/>
+                <a16:creationId xmlns:a16="http://schemas.microsoft.com/office/drawing/2014/main" id="{F51BD50D-4C87-4BC7-A03B-7FABA9ED52EA}"/>
               </a:ext>
             </a:extLst>
           </p:cNvPr>
@@ -5876,7 +5876,7 @@
           <p:cNvPr id="7" name="">
             <a:extLst xmlns:a="http://schemas.openxmlformats.org/drawingml/2006/main">
               <a:ext uri="{FF2B5EF4-FFF2-40B4-BE49-F238E27FC236}">
-                <a16:creationId xmlns:a16="http://schemas.microsoft.com/office/drawing/2014/main" id="{9A5D1A7F-8343-4CAE-8292-62536C4024E5}"/>
+                <a16:creationId xmlns:a16="http://schemas.microsoft.com/office/drawing/2014/main" id="{FCD5E40D-689C-42D2-B1F7-595878936223}"/>
               </a:ext>
             </a:extLst>
           </p:cNvPr>
@@ -5908,7 +5908,7 @@
           <p:cNvPr id="8" name="">
             <a:extLst xmlns:a="http://schemas.openxmlformats.org/drawingml/2006/main">
               <a:ext uri="{FF2B5EF4-FFF2-40B4-BE49-F238E27FC236}">
-                <a16:creationId xmlns:a16="http://schemas.microsoft.com/office/drawing/2014/main" id="{6113B7A5-A770-44CD-B10E-76D4E9F7C850}"/>
+                <a16:creationId xmlns:a16="http://schemas.microsoft.com/office/drawing/2014/main" id="{F1B05A63-E490-4AAD-A3A6-5F5D6B98D623}"/>
               </a:ext>
             </a:extLst>
           </p:cNvPr>
@@ -5965,7 +5965,7 @@
           <p:cNvPr id="9" name="">
             <a:extLst xmlns:a="http://schemas.openxmlformats.org/drawingml/2006/main">
               <a:ext uri="{FF2B5EF4-FFF2-40B4-BE49-F238E27FC236}">
-                <a16:creationId xmlns:a16="http://schemas.microsoft.com/office/drawing/2014/main" id="{1CF78F1A-2138-4398-AB6C-A6184FA75ABF}"/>
+                <a16:creationId xmlns:a16="http://schemas.microsoft.com/office/drawing/2014/main" id="{6860FDA7-A1A3-46C6-AB46-35CB4E0ADFB4}"/>
               </a:ext>
             </a:extLst>
           </p:cNvPr>
@@ -6022,7 +6022,7 @@
           <p:cNvPr id="10" name="">
             <a:extLst xmlns:a="http://schemas.openxmlformats.org/drawingml/2006/main">
               <a:ext uri="{FF2B5EF4-FFF2-40B4-BE49-F238E27FC236}">
-                <a16:creationId xmlns:a16="http://schemas.microsoft.com/office/drawing/2014/main" id="{6A7D5FCC-CC2A-4CD4-84EA-CB9C9552C2CA}"/>
+                <a16:creationId xmlns:a16="http://schemas.microsoft.com/office/drawing/2014/main" id="{3E319993-65A6-42DC-9817-7D48741FE950}"/>
               </a:ext>
             </a:extLst>
           </p:cNvPr>
@@ -6056,7 +6056,7 @@
           <p:cNvPr id="11" name="">
             <a:extLst xmlns:a="http://schemas.openxmlformats.org/drawingml/2006/main">
               <a:ext uri="{FF2B5EF4-FFF2-40B4-BE49-F238E27FC236}">
-                <a16:creationId xmlns:a16="http://schemas.microsoft.com/office/drawing/2014/main" id="{9FE65754-7353-426D-903E-9AB03317DC2B}"/>
+                <a16:creationId xmlns:a16="http://schemas.microsoft.com/office/drawing/2014/main" id="{D91C1F98-043B-4C74-B9EB-969DFB85A415}"/>
               </a:ext>
             </a:extLst>
           </p:cNvPr>
@@ -6088,7 +6088,7 @@
           <p:cNvPr id="12" name="">
             <a:extLst xmlns:a="http://schemas.openxmlformats.org/drawingml/2006/main">
               <a:ext uri="{FF2B5EF4-FFF2-40B4-BE49-F238E27FC236}">
-                <a16:creationId xmlns:a16="http://schemas.microsoft.com/office/drawing/2014/main" id="{5044E652-59EC-4D93-A0FA-69BD05460EDE}"/>
+                <a16:creationId xmlns:a16="http://schemas.microsoft.com/office/drawing/2014/main" id="{0B9BF188-3709-4485-A4EC-29799D5BBB6C}"/>
               </a:ext>
             </a:extLst>
           </p:cNvPr>
@@ -6145,7 +6145,7 @@
           <p:cNvPr id="13" name="">
             <a:extLst xmlns:a="http://schemas.openxmlformats.org/drawingml/2006/main">
               <a:ext uri="{FF2B5EF4-FFF2-40B4-BE49-F238E27FC236}">
-                <a16:creationId xmlns:a16="http://schemas.microsoft.com/office/drawing/2014/main" id="{BA43D1D1-9323-4600-8E04-B919C4E6062F}"/>
+                <a16:creationId xmlns:a16="http://schemas.microsoft.com/office/drawing/2014/main" id="{C101DCCB-4444-4BD3-A7A5-1828817A85A1}"/>
               </a:ext>
             </a:extLst>
           </p:cNvPr>
@@ -6202,7 +6202,7 @@
           <p:cNvPr id="14" name="">
             <a:extLst xmlns:a="http://schemas.openxmlformats.org/drawingml/2006/main">
               <a:ext uri="{FF2B5EF4-FFF2-40B4-BE49-F238E27FC236}">
-                <a16:creationId xmlns:a16="http://schemas.microsoft.com/office/drawing/2014/main" id="{C63D7C11-347B-43C6-AEED-76EF91337A4B}"/>
+                <a16:creationId xmlns:a16="http://schemas.microsoft.com/office/drawing/2014/main" id="{2C5C67A8-C46F-4F3F-AE38-6C3877A36F3F}"/>
               </a:ext>
             </a:extLst>
           </p:cNvPr>
@@ -6236,7 +6236,7 @@
           <p:cNvPr id="15" name="">
             <a:extLst xmlns:a="http://schemas.openxmlformats.org/drawingml/2006/main">
               <a:ext uri="{FF2B5EF4-FFF2-40B4-BE49-F238E27FC236}">
-                <a16:creationId xmlns:a16="http://schemas.microsoft.com/office/drawing/2014/main" id="{4AAF3BAC-288F-4463-B0E8-9F1854C5324A}"/>
+                <a16:creationId xmlns:a16="http://schemas.microsoft.com/office/drawing/2014/main" id="{2FD1BC78-3CCE-4221-A8A1-74A53458B19C}"/>
               </a:ext>
             </a:extLst>
           </p:cNvPr>
@@ -6268,7 +6268,7 @@
           <p:cNvPr id="16" name="">
             <a:extLst xmlns:a="http://schemas.openxmlformats.org/drawingml/2006/main">
               <a:ext uri="{FF2B5EF4-FFF2-40B4-BE49-F238E27FC236}">
-                <a16:creationId xmlns:a16="http://schemas.microsoft.com/office/drawing/2014/main" id="{1D2BE07F-FF14-4090-9459-872A755F4715}"/>
+                <a16:creationId xmlns:a16="http://schemas.microsoft.com/office/drawing/2014/main" id="{148806ED-4D23-4095-8DFC-DF627E2A1EBA}"/>
               </a:ext>
             </a:extLst>
           </p:cNvPr>
@@ -6325,7 +6325,7 @@
           <p:cNvPr id="17" name="">
             <a:extLst xmlns:a="http://schemas.openxmlformats.org/drawingml/2006/main">
               <a:ext uri="{FF2B5EF4-FFF2-40B4-BE49-F238E27FC236}">
-                <a16:creationId xmlns:a16="http://schemas.microsoft.com/office/drawing/2014/main" id="{634D9AAB-EC88-4C0F-BAA1-8761D3B62B50}"/>
+                <a16:creationId xmlns:a16="http://schemas.microsoft.com/office/drawing/2014/main" id="{5797AD13-C12D-4BC3-BE5A-377E666BFC79}"/>
               </a:ext>
             </a:extLst>
           </p:cNvPr>
@@ -6382,7 +6382,7 @@
           <p:cNvPr id="18" name="">
             <a:extLst xmlns:a="http://schemas.openxmlformats.org/drawingml/2006/main">
               <a:ext uri="{FF2B5EF4-FFF2-40B4-BE49-F238E27FC236}">
-                <a16:creationId xmlns:a16="http://schemas.microsoft.com/office/drawing/2014/main" id="{6AD142FE-8638-483F-9237-708FAA523FB8}"/>
+                <a16:creationId xmlns:a16="http://schemas.microsoft.com/office/drawing/2014/main" id="{3C57F256-D253-4826-8EFA-3588569BB406}"/>
               </a:ext>
             </a:extLst>
           </p:cNvPr>
@@ -6416,7 +6416,7 @@
           <p:cNvPr id="19" name="">
             <a:extLst xmlns:a="http://schemas.openxmlformats.org/drawingml/2006/main">
               <a:ext uri="{FF2B5EF4-FFF2-40B4-BE49-F238E27FC236}">
-                <a16:creationId xmlns:a16="http://schemas.microsoft.com/office/drawing/2014/main" id="{EDBDFC3C-8FE2-4AD7-B49D-160AFD7D7BAB}"/>
+                <a16:creationId xmlns:a16="http://schemas.microsoft.com/office/drawing/2014/main" id="{DA515A07-6301-48D2-85D9-4EF01D78A62F}"/>
               </a:ext>
             </a:extLst>
           </p:cNvPr>
@@ -6448,7 +6448,7 @@
           <p:cNvPr id="20" name="">
             <a:extLst xmlns:a="http://schemas.openxmlformats.org/drawingml/2006/main">
               <a:ext uri="{FF2B5EF4-FFF2-40B4-BE49-F238E27FC236}">
-                <a16:creationId xmlns:a16="http://schemas.microsoft.com/office/drawing/2014/main" id="{23F5404B-3BBD-4D97-AE82-4681FC7A3992}"/>
+                <a16:creationId xmlns:a16="http://schemas.microsoft.com/office/drawing/2014/main" id="{A844DA5B-95E7-4277-AD4E-94C4CA849287}"/>
               </a:ext>
             </a:extLst>
           </p:cNvPr>
@@ -6505,7 +6505,7 @@
           <p:cNvPr id="21" name="">
             <a:extLst xmlns:a="http://schemas.openxmlformats.org/drawingml/2006/main">
               <a:ext uri="{FF2B5EF4-FFF2-40B4-BE49-F238E27FC236}">
-                <a16:creationId xmlns:a16="http://schemas.microsoft.com/office/drawing/2014/main" id="{CEA0776C-2C3C-4FB3-9F65-11BA67DF80BD}"/>
+                <a16:creationId xmlns:a16="http://schemas.microsoft.com/office/drawing/2014/main" id="{6E721D72-8E97-4E32-A4EB-D29A9C5BF46C}"/>
               </a:ext>
             </a:extLst>
           </p:cNvPr>
@@ -6562,7 +6562,7 @@
           <p:cNvPr id="22" name="">
             <a:extLst xmlns:a="http://schemas.openxmlformats.org/drawingml/2006/main">
               <a:ext uri="{FF2B5EF4-FFF2-40B4-BE49-F238E27FC236}">
-                <a16:creationId xmlns:a16="http://schemas.microsoft.com/office/drawing/2014/main" id="{2EFA60AC-FA1D-4AF2-9E15-4D38C272184F}"/>
+                <a16:creationId xmlns:a16="http://schemas.microsoft.com/office/drawing/2014/main" id="{CDFD1AA2-8C30-450F-8E5B-E3BC85C47E74}"/>
               </a:ext>
             </a:extLst>
           </p:cNvPr>
@@ -6617,7 +6617,7 @@
     </p:spTree>
     <p:extLst>
       <p:ext uri="{BB962C8B-B14F-4D97-AF65-F5344CB8AC3E}">
-        <p14:creationId xmlns:p14="http://schemas.microsoft.com/office/powerpoint/2010/main" val="331447242"/>
+        <p14:creationId xmlns:p14="http://schemas.microsoft.com/office/powerpoint/2010/main" val="2108335054"/>
       </p:ext>
     </p:extLst>
   </p:cSld>
@@ -6818,7 +6818,7 @@
           <p:cNvPr id="16" name="">
             <a:extLst xmlns:a="http://schemas.openxmlformats.org/drawingml/2006/main">
               <a:ext uri="{FF2B5EF4-FFF2-40B4-BE49-F238E27FC236}">
-                <a16:creationId xmlns:a16="http://schemas.microsoft.com/office/drawing/2014/main" id="{D03E0913-8946-4496-A238-1735F907DE42}"/>
+                <a16:creationId xmlns:a16="http://schemas.microsoft.com/office/drawing/2014/main" id="{C893CC21-F21A-49FB-81DE-4CB972A99AFB}"/>
               </a:ext>
             </a:extLst>
           </p:cNvPr>
@@ -6850,7 +6850,7 @@
           <p:cNvPr id="2" name="">
             <a:extLst xmlns:a="http://schemas.openxmlformats.org/drawingml/2006/main">
               <a:ext uri="{FF2B5EF4-FFF2-40B4-BE49-F238E27FC236}">
-                <a16:creationId xmlns:a16="http://schemas.microsoft.com/office/drawing/2014/main" id="{C984721F-C697-4D7C-B18E-0252A3E2F72B}"/>
+                <a16:creationId xmlns:a16="http://schemas.microsoft.com/office/drawing/2014/main" id="{B31AE63F-3268-4262-85F9-5E3A2DB627AE}"/>
               </a:ext>
             </a:extLst>
           </p:cNvPr>
@@ -6907,7 +6907,7 @@
           <p:cNvPr id="3" name="">
             <a:extLst xmlns:a="http://schemas.openxmlformats.org/drawingml/2006/main">
               <a:ext uri="{FF2B5EF4-FFF2-40B4-BE49-F238E27FC236}">
-                <a16:creationId xmlns:a16="http://schemas.microsoft.com/office/drawing/2014/main" id="{26291381-F801-459C-8992-D3F186BC1225}"/>
+                <a16:creationId xmlns:a16="http://schemas.microsoft.com/office/drawing/2014/main" id="{9F984957-B448-44CB-91E0-3035840D308D}"/>
               </a:ext>
             </a:extLst>
           </p:cNvPr>
@@ -6939,7 +6939,7 @@
           <p:cNvPr id="4" name="">
             <a:extLst xmlns:a="http://schemas.openxmlformats.org/drawingml/2006/main">
               <a:ext uri="{FF2B5EF4-FFF2-40B4-BE49-F238E27FC236}">
-                <a16:creationId xmlns:a16="http://schemas.microsoft.com/office/drawing/2014/main" id="{46E080C5-5050-4B94-A830-2E4F54807F3E}"/>
+                <a16:creationId xmlns:a16="http://schemas.microsoft.com/office/drawing/2014/main" id="{114388D9-7281-476F-9F62-43CA3CD5826E}"/>
               </a:ext>
             </a:extLst>
           </p:cNvPr>
@@ -6996,7 +6996,7 @@
           <p:cNvPr id="5" name="">
             <a:extLst xmlns:a="http://schemas.openxmlformats.org/drawingml/2006/main">
               <a:ext uri="{FF2B5EF4-FFF2-40B4-BE49-F238E27FC236}">
-                <a16:creationId xmlns:a16="http://schemas.microsoft.com/office/drawing/2014/main" id="{0231A33F-FCC3-4E34-91C9-EA6044A13E61}"/>
+                <a16:creationId xmlns:a16="http://schemas.microsoft.com/office/drawing/2014/main" id="{0C50668D-D4D1-49EF-91D2-55A4989C3FEF}"/>
               </a:ext>
             </a:extLst>
           </p:cNvPr>
@@ -7053,7 +7053,7 @@
           <p:cNvPr id="6" name="">
             <a:extLst xmlns:a="http://schemas.openxmlformats.org/drawingml/2006/main">
               <a:ext uri="{FF2B5EF4-FFF2-40B4-BE49-F238E27FC236}">
-                <a16:creationId xmlns:a16="http://schemas.microsoft.com/office/drawing/2014/main" id="{F54EBDFA-30F9-4B5B-B8BD-3B33341B54C3}"/>
+                <a16:creationId xmlns:a16="http://schemas.microsoft.com/office/drawing/2014/main" id="{C73AC463-E32C-44BA-A626-056794C21CCE}"/>
               </a:ext>
             </a:extLst>
           </p:cNvPr>
@@ -7110,7 +7110,7 @@
           <p:cNvPr id="7" name="">
             <a:extLst xmlns:a="http://schemas.openxmlformats.org/drawingml/2006/main">
               <a:ext uri="{FF2B5EF4-FFF2-40B4-BE49-F238E27FC236}">
-                <a16:creationId xmlns:a16="http://schemas.microsoft.com/office/drawing/2014/main" id="{9D2C4047-901E-42C3-ADE7-822414EA1B38}"/>
+                <a16:creationId xmlns:a16="http://schemas.microsoft.com/office/drawing/2014/main" id="{FAEBBC3A-DF53-4C80-B89B-5C9E8C110A55}"/>
               </a:ext>
             </a:extLst>
           </p:cNvPr>
@@ -7142,7 +7142,7 @@
           <p:cNvPr id="8" name="">
             <a:extLst xmlns:a="http://schemas.openxmlformats.org/drawingml/2006/main">
               <a:ext uri="{FF2B5EF4-FFF2-40B4-BE49-F238E27FC236}">
-                <a16:creationId xmlns:a16="http://schemas.microsoft.com/office/drawing/2014/main" id="{997A41FD-D172-41BE-907B-DE948CA1E3B2}"/>
+                <a16:creationId xmlns:a16="http://schemas.microsoft.com/office/drawing/2014/main" id="{2D8ECB32-053D-417C-B976-A14C1BB4F42A}"/>
               </a:ext>
             </a:extLst>
           </p:cNvPr>
@@ -7199,7 +7199,7 @@
           <p:cNvPr id="9" name="">
             <a:extLst xmlns:a="http://schemas.openxmlformats.org/drawingml/2006/main">
               <a:ext uri="{FF2B5EF4-FFF2-40B4-BE49-F238E27FC236}">
-                <a16:creationId xmlns:a16="http://schemas.microsoft.com/office/drawing/2014/main" id="{0FC9B979-C964-4718-A5D6-A715383779B5}"/>
+                <a16:creationId xmlns:a16="http://schemas.microsoft.com/office/drawing/2014/main" id="{7D1918BB-C5FB-4AEC-A124-1A93E3B569CE}"/>
               </a:ext>
             </a:extLst>
           </p:cNvPr>
@@ -7256,7 +7256,7 @@
           <p:cNvPr id="10" name="">
             <a:extLst xmlns:a="http://schemas.openxmlformats.org/drawingml/2006/main">
               <a:ext uri="{FF2B5EF4-FFF2-40B4-BE49-F238E27FC236}">
-                <a16:creationId xmlns:a16="http://schemas.microsoft.com/office/drawing/2014/main" id="{6458AFD3-EEE1-4A71-A4B8-F47FBA4902E3}"/>
+                <a16:creationId xmlns:a16="http://schemas.microsoft.com/office/drawing/2014/main" id="{8A201A6B-F813-4349-A38E-AFA6D3372905}"/>
               </a:ext>
             </a:extLst>
           </p:cNvPr>
@@ -7313,7 +7313,7 @@
           <p:cNvPr id="11" name="">
             <a:extLst xmlns:a="http://schemas.openxmlformats.org/drawingml/2006/main">
               <a:ext uri="{FF2B5EF4-FFF2-40B4-BE49-F238E27FC236}">
-                <a16:creationId xmlns:a16="http://schemas.microsoft.com/office/drawing/2014/main" id="{A468A82D-19BA-4702-938A-C2B962590850}"/>
+                <a16:creationId xmlns:a16="http://schemas.microsoft.com/office/drawing/2014/main" id="{97DB5BA2-BCBD-449A-AC62-7FD6499D121A}"/>
               </a:ext>
             </a:extLst>
           </p:cNvPr>
@@ -7345,7 +7345,7 @@
           <p:cNvPr id="12" name="">
             <a:extLst xmlns:a="http://schemas.openxmlformats.org/drawingml/2006/main">
               <a:ext uri="{FF2B5EF4-FFF2-40B4-BE49-F238E27FC236}">
-                <a16:creationId xmlns:a16="http://schemas.microsoft.com/office/drawing/2014/main" id="{FA218ACF-1C66-45F0-B5FE-D1293BD4E995}"/>
+                <a16:creationId xmlns:a16="http://schemas.microsoft.com/office/drawing/2014/main" id="{1BB92882-19C8-4500-B6CB-AB63B5363442}"/>
               </a:ext>
             </a:extLst>
           </p:cNvPr>
@@ -7402,7 +7402,7 @@
           <p:cNvPr id="13" name="">
             <a:extLst xmlns:a="http://schemas.openxmlformats.org/drawingml/2006/main">
               <a:ext uri="{FF2B5EF4-FFF2-40B4-BE49-F238E27FC236}">
-                <a16:creationId xmlns:a16="http://schemas.microsoft.com/office/drawing/2014/main" id="{299B371B-0CF0-4942-922D-A63134BCD1E1}"/>
+                <a16:creationId xmlns:a16="http://schemas.microsoft.com/office/drawing/2014/main" id="{42D39F8D-C3DA-4E7D-9E87-012DDE7191AD}"/>
               </a:ext>
             </a:extLst>
           </p:cNvPr>
@@ -7459,7 +7459,7 @@
           <p:cNvPr id="14" name="">
             <a:extLst xmlns:a="http://schemas.openxmlformats.org/drawingml/2006/main">
               <a:ext uri="{FF2B5EF4-FFF2-40B4-BE49-F238E27FC236}">
-                <a16:creationId xmlns:a16="http://schemas.microsoft.com/office/drawing/2014/main" id="{AF705DA1-3A6C-480A-A893-D4642635DD74}"/>
+                <a16:creationId xmlns:a16="http://schemas.microsoft.com/office/drawing/2014/main" id="{EE99A4A4-5F36-4956-904F-AA684C15E072}"/>
               </a:ext>
             </a:extLst>
           </p:cNvPr>
@@ -7516,7 +7516,7 @@
           <p:cNvPr id="15" name="">
             <a:extLst xmlns:a="http://schemas.openxmlformats.org/drawingml/2006/main">
               <a:ext uri="{FF2B5EF4-FFF2-40B4-BE49-F238E27FC236}">
-                <a16:creationId xmlns:a16="http://schemas.microsoft.com/office/drawing/2014/main" id="{2F34A98B-CB95-40AF-AC90-64A1F68E7328}"/>
+                <a16:creationId xmlns:a16="http://schemas.microsoft.com/office/drawing/2014/main" id="{6C3141C0-694A-42CC-8CF7-5988140E7671}"/>
               </a:ext>
             </a:extLst>
           </p:cNvPr>
@@ -7571,7 +7571,7 @@
     </p:spTree>
     <p:extLst>
       <p:ext uri="{BB962C8B-B14F-4D97-AF65-F5344CB8AC3E}">
-        <p14:creationId xmlns:p14="http://schemas.microsoft.com/office/powerpoint/2010/main" val="1573099377"/>
+        <p14:creationId xmlns:p14="http://schemas.microsoft.com/office/powerpoint/2010/main" val="624771747"/>
       </p:ext>
     </p:extLst>
   </p:cSld>
@@ -7769,10 +7769,10 @@
       </p:grpSpPr>
       <p:sp>
         <p:nvSpPr>
-          <p:cNvPr id="23" name="">
-            <a:extLst xmlns:a="http://schemas.openxmlformats.org/drawingml/2006/main">
-              <a:ext uri="{FF2B5EF4-FFF2-40B4-BE49-F238E27FC236}">
-                <a16:creationId xmlns:a16="http://schemas.microsoft.com/office/drawing/2014/main" id="{B871D177-9598-4EB1-A5D9-71B966ADC412}"/>
+          <p:cNvPr id="26" name="">
+            <a:extLst xmlns:a="http://schemas.openxmlformats.org/drawingml/2006/main">
+              <a:ext uri="{FF2B5EF4-FFF2-40B4-BE49-F238E27FC236}">
+                <a16:creationId xmlns:a16="http://schemas.microsoft.com/office/drawing/2014/main" id="{1038710E-6770-4262-A14E-D66DE2AE8BA9}"/>
               </a:ext>
             </a:extLst>
           </p:cNvPr>
@@ -7804,7 +7804,7 @@
           <p:cNvPr id="2" name="">
             <a:extLst xmlns:a="http://schemas.openxmlformats.org/drawingml/2006/main">
               <a:ext uri="{FF2B5EF4-FFF2-40B4-BE49-F238E27FC236}">
-                <a16:creationId xmlns:a16="http://schemas.microsoft.com/office/drawing/2014/main" id="{3890C0FA-6C35-4829-A08F-BA59C6593621}"/>
+                <a16:creationId xmlns:a16="http://schemas.microsoft.com/office/drawing/2014/main" id="{C2354952-A357-43CE-BF7C-CF672545975A}"/>
               </a:ext>
             </a:extLst>
           </p:cNvPr>
@@ -7861,7 +7861,7 @@
           <p:cNvPr id="3" name="">
             <a:extLst xmlns:a="http://schemas.openxmlformats.org/drawingml/2006/main">
               <a:ext uri="{FF2B5EF4-FFF2-40B4-BE49-F238E27FC236}">
-                <a16:creationId xmlns:a16="http://schemas.microsoft.com/office/drawing/2014/main" id="{7069218A-BB85-40E3-B9E6-DDFB234B85F4}"/>
+                <a16:creationId xmlns:a16="http://schemas.microsoft.com/office/drawing/2014/main" id="{B21E8E47-2F2E-4AB9-981B-0E82BEBFA705}"/>
               </a:ext>
             </a:extLst>
           </p:cNvPr>
@@ -7893,7 +7893,7 @@
           <p:cNvPr id="4" name="">
             <a:extLst xmlns:a="http://schemas.openxmlformats.org/drawingml/2006/main">
               <a:ext uri="{FF2B5EF4-FFF2-40B4-BE49-F238E27FC236}">
-                <a16:creationId xmlns:a16="http://schemas.microsoft.com/office/drawing/2014/main" id="{D6EED98D-813E-4CC0-9C8A-1404F9910568}"/>
+                <a16:creationId xmlns:a16="http://schemas.microsoft.com/office/drawing/2014/main" id="{2FB85D31-7636-43F3-AB72-EADCBE5357CE}"/>
               </a:ext>
             </a:extLst>
           </p:cNvPr>
@@ -7950,7 +7950,7 @@
           <p:cNvPr id="5" name="">
             <a:extLst xmlns:a="http://schemas.openxmlformats.org/drawingml/2006/main">
               <a:ext uri="{FF2B5EF4-FFF2-40B4-BE49-F238E27FC236}">
-                <a16:creationId xmlns:a16="http://schemas.microsoft.com/office/drawing/2014/main" id="{D2BFAD93-51E0-4973-9A83-C362118DDCFF}"/>
+                <a16:creationId xmlns:a16="http://schemas.microsoft.com/office/drawing/2014/main" id="{2D5EE542-A9F2-4268-9DD2-5AC7936C9AD1}"/>
               </a:ext>
             </a:extLst>
           </p:cNvPr>
@@ -8007,7 +8007,7 @@
           <p:cNvPr id="6" name="">
             <a:extLst xmlns:a="http://schemas.openxmlformats.org/drawingml/2006/main">
               <a:ext uri="{FF2B5EF4-FFF2-40B4-BE49-F238E27FC236}">
-                <a16:creationId xmlns:a16="http://schemas.microsoft.com/office/drawing/2014/main" id="{15A4511C-4E80-4389-9E5E-1A01D2E724F9}"/>
+                <a16:creationId xmlns:a16="http://schemas.microsoft.com/office/drawing/2014/main" id="{4FEC97C4-9888-432F-AF8E-DA177FC87B83}"/>
               </a:ext>
             </a:extLst>
           </p:cNvPr>
@@ -8064,7 +8064,7 @@
           <p:cNvPr id="7" name="">
             <a:extLst xmlns:a="http://schemas.openxmlformats.org/drawingml/2006/main">
               <a:ext uri="{FF2B5EF4-FFF2-40B4-BE49-F238E27FC236}">
-                <a16:creationId xmlns:a16="http://schemas.microsoft.com/office/drawing/2014/main" id="{0B161C89-1CED-4EBD-AEA6-12D8C61870D0}"/>
+                <a16:creationId xmlns:a16="http://schemas.microsoft.com/office/drawing/2014/main" id="{46025CF7-96B4-4C24-A7DD-FF1E13D6CB4A}"/>
               </a:ext>
             </a:extLst>
           </p:cNvPr>
@@ -8096,7 +8096,7 @@
           <p:cNvPr id="8" name="">
             <a:extLst xmlns:a="http://schemas.openxmlformats.org/drawingml/2006/main">
               <a:ext uri="{FF2B5EF4-FFF2-40B4-BE49-F238E27FC236}">
-                <a16:creationId xmlns:a16="http://schemas.microsoft.com/office/drawing/2014/main" id="{8B8A7DBF-55B3-47D6-9D73-0032BF4BA584}"/>
+                <a16:creationId xmlns:a16="http://schemas.microsoft.com/office/drawing/2014/main" id="{9261D0C9-0547-4ACD-850E-AE802A4C0E0F}"/>
               </a:ext>
             </a:extLst>
           </p:cNvPr>
@@ -8153,7 +8153,7 @@
           <p:cNvPr id="9" name="">
             <a:extLst xmlns:a="http://schemas.openxmlformats.org/drawingml/2006/main">
               <a:ext uri="{FF2B5EF4-FFF2-40B4-BE49-F238E27FC236}">
-                <a16:creationId xmlns:a16="http://schemas.microsoft.com/office/drawing/2014/main" id="{043E25E1-8C26-41C9-906F-9873C455D087}"/>
+                <a16:creationId xmlns:a16="http://schemas.microsoft.com/office/drawing/2014/main" id="{F1B566FE-9ADC-47C1-8305-9CEE6F394533}"/>
               </a:ext>
             </a:extLst>
           </p:cNvPr>
@@ -8210,19 +8210,19 @@
           <p:cNvPr id="10" name="">
             <a:extLst xmlns:a="http://schemas.openxmlformats.org/drawingml/2006/main">
               <a:ext uri="{FF2B5EF4-FFF2-40B4-BE49-F238E27FC236}">
-                <a16:creationId xmlns:a16="http://schemas.microsoft.com/office/drawing/2014/main" id="{408CB57D-D1C1-4390-B831-0B3120C2244B}"/>
-              </a:ext>
-            </a:extLst>
-          </p:cNvPr>
-          <p:cNvSpPr>
-            <a:spLocks xmlns:a="http://schemas.openxmlformats.org/drawingml/2006/main" noGrp="1"/>
-          </p:cNvSpPr>
-          <p:nvPr/>
-        </p:nvSpPr>
-        <p:spPr>
-          <a:xfrm xmlns:a="http://schemas.openxmlformats.org/drawingml/2006/main">
-            <a:off x="914400" y="1257300"/>
-            <a:ext cx="10363200" cy="781050"/>
+                <a16:creationId xmlns:a16="http://schemas.microsoft.com/office/drawing/2014/main" id="{F46FFE69-4BEF-429C-B2A6-0EA7B34E5C6F}"/>
+              </a:ext>
+            </a:extLst>
+          </p:cNvPr>
+          <p:cNvSpPr>
+            <a:spLocks xmlns:a="http://schemas.openxmlformats.org/drawingml/2006/main" noGrp="1"/>
+          </p:cNvSpPr>
+          <p:nvPr/>
+        </p:nvSpPr>
+        <p:spPr>
+          <a:xfrm xmlns:a="http://schemas.openxmlformats.org/drawingml/2006/main">
+            <a:off x="857250" y="1219200"/>
+            <a:ext cx="10477500" cy="742950"/>
           </a:xfrm>
           <a:prstGeom xmlns:a="http://schemas.openxmlformats.org/drawingml/2006/main" prst="rect">
             <a:avLst/>
@@ -8239,7 +8239,7 @@
           <a:lstStyle xmlns:a="http://schemas.openxmlformats.org/drawingml/2006/main"/>
           <a:p xmlns:a="http://schemas.openxmlformats.org/drawingml/2006/main">
             <a:pPr algn="ctr">
-              <a:defRPr sz="2175" b="1">
+              <a:defRPr sz="2100" b="1">
                 <a:solidFill>
                   <a:srgbClr val="17253A"/>
                 </a:solidFill>
@@ -8249,7 +8249,7 @@
               </a:defRPr>
             </a:pPr>
             <a:r>
-              <a:rPr sz="2175" b="1">
+              <a:rPr sz="2100" b="1">
                 <a:solidFill>
                   <a:srgbClr val="17253A"/>
                 </a:solidFill>
@@ -8267,28 +8267,30 @@
           <p:cNvPr id="11" name="">
             <a:extLst xmlns:a="http://schemas.openxmlformats.org/drawingml/2006/main">
               <a:ext uri="{FF2B5EF4-FFF2-40B4-BE49-F238E27FC236}">
-                <a16:creationId xmlns:a16="http://schemas.microsoft.com/office/drawing/2014/main" id="{9DC3C4C0-6191-4169-919B-3CD17A3855F5}"/>
-              </a:ext>
-            </a:extLst>
-          </p:cNvPr>
-          <p:cNvSpPr>
-            <a:spLocks xmlns:a="http://schemas.openxmlformats.org/drawingml/2006/main" noGrp="1"/>
-          </p:cNvSpPr>
-          <p:nvPr/>
-        </p:nvSpPr>
-        <p:spPr>
-          <a:xfrm xmlns:a="http://schemas.openxmlformats.org/drawingml/2006/main">
-            <a:off x="1000125" y="2247900"/>
-            <a:ext cx="476250" cy="476250"/>
-          </a:xfrm>
-          <a:prstGeom xmlns:a="http://schemas.openxmlformats.org/drawingml/2006/main" prst="ellipse">
+                <a16:creationId xmlns:a16="http://schemas.microsoft.com/office/drawing/2014/main" id="{6F8DDDAB-C007-4581-9137-CBB4F0093A4B}"/>
+              </a:ext>
+            </a:extLst>
+          </p:cNvPr>
+          <p:cNvSpPr>
+            <a:spLocks xmlns:a="http://schemas.openxmlformats.org/drawingml/2006/main" noGrp="1"/>
+          </p:cNvSpPr>
+          <p:nvPr/>
+        </p:nvSpPr>
+        <p:spPr>
+          <a:xfrm xmlns:a="http://schemas.openxmlformats.org/drawingml/2006/main">
+            <a:off x="971550" y="2124075"/>
+            <a:ext cx="38100" cy="3524250"/>
+          </a:xfrm>
+          <a:prstGeom xmlns:a="http://schemas.openxmlformats.org/drawingml/2006/main" prst="rect">
             <a:avLst/>
           </a:prstGeom>
           <a:solidFill xmlns:a="http://schemas.openxmlformats.org/drawingml/2006/main">
-            <a:srgbClr val="18324A"/>
+            <a:srgbClr val="2C6E73"/>
           </a:solidFill>
           <a:ln xmlns:a="http://schemas.openxmlformats.org/drawingml/2006/main" w="0">
-            <a:noFill/>
+            <a:solidFill>
+              <a:srgbClr val="2C6E73"/>
+            </a:solidFill>
           </a:ln>
         </p:spPr>
       </p:sp>
@@ -8297,19 +8299,19 @@
           <p:cNvPr id="12" name="">
             <a:extLst xmlns:a="http://schemas.openxmlformats.org/drawingml/2006/main">
               <a:ext uri="{FF2B5EF4-FFF2-40B4-BE49-F238E27FC236}">
-                <a16:creationId xmlns:a16="http://schemas.microsoft.com/office/drawing/2014/main" id="{D9DD1F68-3851-4317-BBAC-A22E862A2FC1}"/>
-              </a:ext>
-            </a:extLst>
-          </p:cNvPr>
-          <p:cNvSpPr>
-            <a:spLocks xmlns:a="http://schemas.openxmlformats.org/drawingml/2006/main" noGrp="1"/>
-          </p:cNvSpPr>
-          <p:nvPr/>
-        </p:nvSpPr>
-        <p:spPr>
-          <a:xfrm xmlns:a="http://schemas.openxmlformats.org/drawingml/2006/main">
-            <a:off x="1000125" y="2276475"/>
-            <a:ext cx="476250" cy="419100"/>
+                <a16:creationId xmlns:a16="http://schemas.microsoft.com/office/drawing/2014/main" id="{2578A7B8-1EE8-40DC-8C6E-356B58BBEDAF}"/>
+              </a:ext>
+            </a:extLst>
+          </p:cNvPr>
+          <p:cNvSpPr>
+            <a:spLocks xmlns:a="http://schemas.openxmlformats.org/drawingml/2006/main" noGrp="1"/>
+          </p:cNvSpPr>
+          <p:nvPr/>
+        </p:nvSpPr>
+        <p:spPr>
+          <a:xfrm xmlns:a="http://schemas.openxmlformats.org/drawingml/2006/main">
+            <a:off x="1162050" y="2200275"/>
+            <a:ext cx="400050" cy="400050"/>
           </a:xfrm>
           <a:prstGeom xmlns:a="http://schemas.openxmlformats.org/drawingml/2006/main" prst="rect">
             <a:avLst/>
@@ -8326,9 +8328,9 @@
           <a:lstStyle xmlns:a="http://schemas.openxmlformats.org/drawingml/2006/main"/>
           <a:p xmlns:a="http://schemas.openxmlformats.org/drawingml/2006/main">
             <a:pPr algn="ctr">
-              <a:defRPr sz="1350" b="1">
-                <a:solidFill>
-                  <a:srgbClr val="FFFFFF"/>
+              <a:defRPr sz="1125" b="1">
+                <a:solidFill>
+                  <a:srgbClr val="2C6E73"/>
                 </a:solidFill>
                 <a:latin typeface="Arial"/>
                 <a:ea typeface="Arial"/>
@@ -8336,9 +8338,9 @@
               </a:defRPr>
             </a:pPr>
             <a:r>
-              <a:rPr sz="1350" b="1">
-                <a:solidFill>
-                  <a:srgbClr val="FFFFFF"/>
+              <a:rPr sz="1125" b="1">
+                <a:solidFill>
+                  <a:srgbClr val="2C6E73"/>
                 </a:solidFill>
                 <a:latin typeface="Arial"/>
                 <a:ea typeface="Arial"/>
@@ -8354,19 +8356,19 @@
           <p:cNvPr id="13" name="">
             <a:extLst xmlns:a="http://schemas.openxmlformats.org/drawingml/2006/main">
               <a:ext uri="{FF2B5EF4-FFF2-40B4-BE49-F238E27FC236}">
-                <a16:creationId xmlns:a16="http://schemas.microsoft.com/office/drawing/2014/main" id="{244911B8-5291-4C63-BF44-63C5115A14A4}"/>
-              </a:ext>
-            </a:extLst>
-          </p:cNvPr>
-          <p:cNvSpPr>
-            <a:spLocks xmlns:a="http://schemas.openxmlformats.org/drawingml/2006/main" noGrp="1"/>
-          </p:cNvSpPr>
-          <p:nvPr/>
-        </p:nvSpPr>
-        <p:spPr>
-          <a:xfrm xmlns:a="http://schemas.openxmlformats.org/drawingml/2006/main">
-            <a:off x="1714500" y="2181225"/>
-            <a:ext cx="9429750" cy="609600"/>
+                <a16:creationId xmlns:a16="http://schemas.microsoft.com/office/drawing/2014/main" id="{316F9630-E0AB-4CCA-86A9-260C7C1B504F}"/>
+              </a:ext>
+            </a:extLst>
+          </p:cNvPr>
+          <p:cNvSpPr>
+            <a:spLocks xmlns:a="http://schemas.openxmlformats.org/drawingml/2006/main" noGrp="1"/>
+          </p:cNvSpPr>
+          <p:nvPr/>
+        </p:nvSpPr>
+        <p:spPr>
+          <a:xfrm xmlns:a="http://schemas.openxmlformats.org/drawingml/2006/main">
+            <a:off x="1714500" y="2114550"/>
+            <a:ext cx="9525000" cy="638175"/>
           </a:xfrm>
           <a:prstGeom xmlns:a="http://schemas.openxmlformats.org/drawingml/2006/main" prst="rect">
             <a:avLst/>
@@ -8383,7 +8385,7 @@
           <a:lstStyle xmlns:a="http://schemas.openxmlformats.org/drawingml/2006/main"/>
           <a:p xmlns:a="http://schemas.openxmlformats.org/drawingml/2006/main">
             <a:pPr algn="l">
-              <a:defRPr sz="1500" b="0">
+              <a:defRPr sz="1575" b="0">
                 <a:solidFill>
                   <a:srgbClr val="17253A"/>
                 </a:solidFill>
@@ -8393,7 +8395,7 @@
               </a:defRPr>
             </a:pPr>
             <a:r>
-              <a:rPr sz="1500" b="0">
+              <a:rPr sz="1575" b="0">
                 <a:solidFill>
                   <a:srgbClr val="17253A"/>
                 </a:solidFill>
@@ -8401,7 +8403,7 @@
                 <a:ea typeface="Arial"/>
                 <a:cs typeface="Arial"/>
               </a:rPr>
-              <a:t>Identify the structure: Identify useful common factors or a common denominator.</a:t>
+              <a:t>2/3, 3/4, 5/6</a:t>
             </a:r>
           </a:p>
         </p:txBody>
@@ -8411,28 +8413,30 @@
           <p:cNvPr id="14" name="">
             <a:extLst xmlns:a="http://schemas.openxmlformats.org/drawingml/2006/main">
               <a:ext uri="{FF2B5EF4-FFF2-40B4-BE49-F238E27FC236}">
-                <a16:creationId xmlns:a16="http://schemas.microsoft.com/office/drawing/2014/main" id="{2DD57C87-5DE6-4D28-88C6-F5072142C33A}"/>
-              </a:ext>
-            </a:extLst>
-          </p:cNvPr>
-          <p:cNvSpPr>
-            <a:spLocks xmlns:a="http://schemas.openxmlformats.org/drawingml/2006/main" noGrp="1"/>
-          </p:cNvSpPr>
-          <p:nvPr/>
-        </p:nvSpPr>
-        <p:spPr>
-          <a:xfrm xmlns:a="http://schemas.openxmlformats.org/drawingml/2006/main">
-            <a:off x="1000125" y="2990850"/>
-            <a:ext cx="476250" cy="476250"/>
-          </a:xfrm>
-          <a:prstGeom xmlns:a="http://schemas.openxmlformats.org/drawingml/2006/main" prst="ellipse">
+                <a16:creationId xmlns:a16="http://schemas.microsoft.com/office/drawing/2014/main" id="{E4B79A98-D81B-4F42-8D0E-4737B070FCA1}"/>
+              </a:ext>
+            </a:extLst>
+          </p:cNvPr>
+          <p:cNvSpPr>
+            <a:spLocks xmlns:a="http://schemas.openxmlformats.org/drawingml/2006/main" noGrp="1"/>
+          </p:cNvSpPr>
+          <p:nvPr/>
+        </p:nvSpPr>
+        <p:spPr>
+          <a:xfrm xmlns:a="http://schemas.openxmlformats.org/drawingml/2006/main">
+            <a:off x="1714500" y="2771775"/>
+            <a:ext cx="9334500" cy="9525"/>
+          </a:xfrm>
+          <a:prstGeom xmlns:a="http://schemas.openxmlformats.org/drawingml/2006/main" prst="rect">
             <a:avLst/>
           </a:prstGeom>
           <a:solidFill xmlns:a="http://schemas.openxmlformats.org/drawingml/2006/main">
-            <a:srgbClr val="2C6E73"/>
+            <a:srgbClr val="D9E0E6"/>
           </a:solidFill>
           <a:ln xmlns:a="http://schemas.openxmlformats.org/drawingml/2006/main" w="0">
-            <a:noFill/>
+            <a:solidFill>
+              <a:srgbClr val="D9E0E6"/>
+            </a:solidFill>
           </a:ln>
         </p:spPr>
       </p:sp>
@@ -8441,19 +8445,19 @@
           <p:cNvPr id="15" name="">
             <a:extLst xmlns:a="http://schemas.openxmlformats.org/drawingml/2006/main">
               <a:ext uri="{FF2B5EF4-FFF2-40B4-BE49-F238E27FC236}">
-                <a16:creationId xmlns:a16="http://schemas.microsoft.com/office/drawing/2014/main" id="{F9A24775-EDB5-4CCF-A5D1-A61E08875BD8}"/>
-              </a:ext>
-            </a:extLst>
-          </p:cNvPr>
-          <p:cNvSpPr>
-            <a:spLocks xmlns:a="http://schemas.openxmlformats.org/drawingml/2006/main" noGrp="1"/>
-          </p:cNvSpPr>
-          <p:nvPr/>
-        </p:nvSpPr>
-        <p:spPr>
-          <a:xfrm xmlns:a="http://schemas.openxmlformats.org/drawingml/2006/main">
-            <a:off x="1000125" y="3019425"/>
-            <a:ext cx="476250" cy="419100"/>
+                <a16:creationId xmlns:a16="http://schemas.microsoft.com/office/drawing/2014/main" id="{317C3CFB-6978-40E8-93C8-5D7D44C7B15F}"/>
+              </a:ext>
+            </a:extLst>
+          </p:cNvPr>
+          <p:cNvSpPr>
+            <a:spLocks xmlns:a="http://schemas.openxmlformats.org/drawingml/2006/main" noGrp="1"/>
+          </p:cNvSpPr>
+          <p:nvPr/>
+        </p:nvSpPr>
+        <p:spPr>
+          <a:xfrm xmlns:a="http://schemas.openxmlformats.org/drawingml/2006/main">
+            <a:off x="1162050" y="2905125"/>
+            <a:ext cx="400050" cy="400050"/>
           </a:xfrm>
           <a:prstGeom xmlns:a="http://schemas.openxmlformats.org/drawingml/2006/main" prst="rect">
             <a:avLst/>
@@ -8470,9 +8474,9 @@
           <a:lstStyle xmlns:a="http://schemas.openxmlformats.org/drawingml/2006/main"/>
           <a:p xmlns:a="http://schemas.openxmlformats.org/drawingml/2006/main">
             <a:pPr algn="ctr">
-              <a:defRPr sz="1350" b="1">
-                <a:solidFill>
-                  <a:srgbClr val="FFFFFF"/>
+              <a:defRPr sz="1125" b="1">
+                <a:solidFill>
+                  <a:srgbClr val="2C6E73"/>
                 </a:solidFill>
                 <a:latin typeface="Arial"/>
                 <a:ea typeface="Arial"/>
@@ -8480,9 +8484,9 @@
               </a:defRPr>
             </a:pPr>
             <a:r>
-              <a:rPr sz="1350" b="1">
-                <a:solidFill>
-                  <a:srgbClr val="FFFFFF"/>
+              <a:rPr sz="1125" b="1">
+                <a:solidFill>
+                  <a:srgbClr val="2C6E73"/>
                 </a:solidFill>
                 <a:latin typeface="Arial"/>
                 <a:ea typeface="Arial"/>
@@ -8498,19 +8502,19 @@
           <p:cNvPr id="16" name="">
             <a:extLst xmlns:a="http://schemas.openxmlformats.org/drawingml/2006/main">
               <a:ext uri="{FF2B5EF4-FFF2-40B4-BE49-F238E27FC236}">
-                <a16:creationId xmlns:a16="http://schemas.microsoft.com/office/drawing/2014/main" id="{A0AD1249-5C2D-4166-9F51-60C9C402B8D6}"/>
-              </a:ext>
-            </a:extLst>
-          </p:cNvPr>
-          <p:cNvSpPr>
-            <a:spLocks xmlns:a="http://schemas.openxmlformats.org/drawingml/2006/main" noGrp="1"/>
-          </p:cNvSpPr>
-          <p:nvPr/>
-        </p:nvSpPr>
-        <p:spPr>
-          <a:xfrm xmlns:a="http://schemas.openxmlformats.org/drawingml/2006/main">
-            <a:off x="1714500" y="2924175"/>
-            <a:ext cx="9429750" cy="609600"/>
+                <a16:creationId xmlns:a16="http://schemas.microsoft.com/office/drawing/2014/main" id="{F1AC51EF-F058-4822-9586-48DEB981791E}"/>
+              </a:ext>
+            </a:extLst>
+          </p:cNvPr>
+          <p:cNvSpPr>
+            <a:spLocks xmlns:a="http://schemas.openxmlformats.org/drawingml/2006/main" noGrp="1"/>
+          </p:cNvSpPr>
+          <p:nvPr/>
+        </p:nvSpPr>
+        <p:spPr>
+          <a:xfrm xmlns:a="http://schemas.openxmlformats.org/drawingml/2006/main">
+            <a:off x="1714500" y="2819400"/>
+            <a:ext cx="9525000" cy="638175"/>
           </a:xfrm>
           <a:prstGeom xmlns:a="http://schemas.openxmlformats.org/drawingml/2006/main" prst="rect">
             <a:avLst/>
@@ -8527,7 +8531,7 @@
           <a:lstStyle xmlns:a="http://schemas.openxmlformats.org/drawingml/2006/main"/>
           <a:p xmlns:a="http://schemas.openxmlformats.org/drawingml/2006/main">
             <a:pPr algn="l">
-              <a:defRPr sz="1500" b="0">
+              <a:defRPr sz="1575" b="0">
                 <a:solidFill>
                   <a:srgbClr val="17253A"/>
                 </a:solidFill>
@@ -8537,7 +8541,7 @@
               </a:defRPr>
             </a:pPr>
             <a:r>
-              <a:rPr sz="1500" b="0">
+              <a:rPr sz="1575" b="0">
                 <a:solidFill>
                   <a:srgbClr val="17253A"/>
                 </a:solidFill>
@@ -8545,7 +8549,7 @@
                 <a:ea typeface="Arial"/>
                 <a:cs typeface="Arial"/>
               </a:rPr>
-              <a:t>Set up the method: Convert or simplify without changing the fraction's value.</a:t>
+              <a:t>Common denominator = 12</a:t>
             </a:r>
           </a:p>
         </p:txBody>
@@ -8555,28 +8559,30 @@
           <p:cNvPr id="17" name="">
             <a:extLst xmlns:a="http://schemas.openxmlformats.org/drawingml/2006/main">
               <a:ext uri="{FF2B5EF4-FFF2-40B4-BE49-F238E27FC236}">
-                <a16:creationId xmlns:a16="http://schemas.microsoft.com/office/drawing/2014/main" id="{082A50E3-EDFD-49B7-8C6D-353EEEAA8F23}"/>
-              </a:ext>
-            </a:extLst>
-          </p:cNvPr>
-          <p:cNvSpPr>
-            <a:spLocks xmlns:a="http://schemas.openxmlformats.org/drawingml/2006/main" noGrp="1"/>
-          </p:cNvSpPr>
-          <p:nvPr/>
-        </p:nvSpPr>
-        <p:spPr>
-          <a:xfrm xmlns:a="http://schemas.openxmlformats.org/drawingml/2006/main">
-            <a:off x="1000125" y="3733800"/>
-            <a:ext cx="476250" cy="476250"/>
-          </a:xfrm>
-          <a:prstGeom xmlns:a="http://schemas.openxmlformats.org/drawingml/2006/main" prst="ellipse">
+                <a16:creationId xmlns:a16="http://schemas.microsoft.com/office/drawing/2014/main" id="{832897AD-511A-42CB-8594-EAF36E14EE3D}"/>
+              </a:ext>
+            </a:extLst>
+          </p:cNvPr>
+          <p:cNvSpPr>
+            <a:spLocks xmlns:a="http://schemas.openxmlformats.org/drawingml/2006/main" noGrp="1"/>
+          </p:cNvSpPr>
+          <p:nvPr/>
+        </p:nvSpPr>
+        <p:spPr>
+          <a:xfrm xmlns:a="http://schemas.openxmlformats.org/drawingml/2006/main">
+            <a:off x="1714500" y="3476625"/>
+            <a:ext cx="9334500" cy="9525"/>
+          </a:xfrm>
+          <a:prstGeom xmlns:a="http://schemas.openxmlformats.org/drawingml/2006/main" prst="rect">
             <a:avLst/>
           </a:prstGeom>
           <a:solidFill xmlns:a="http://schemas.openxmlformats.org/drawingml/2006/main">
-            <a:srgbClr val="2C6E73"/>
+            <a:srgbClr val="D9E0E6"/>
           </a:solidFill>
           <a:ln xmlns:a="http://schemas.openxmlformats.org/drawingml/2006/main" w="0">
-            <a:noFill/>
+            <a:solidFill>
+              <a:srgbClr val="D9E0E6"/>
+            </a:solidFill>
           </a:ln>
         </p:spPr>
       </p:sp>
@@ -8585,19 +8591,19 @@
           <p:cNvPr id="18" name="">
             <a:extLst xmlns:a="http://schemas.openxmlformats.org/drawingml/2006/main">
               <a:ext uri="{FF2B5EF4-FFF2-40B4-BE49-F238E27FC236}">
-                <a16:creationId xmlns:a16="http://schemas.microsoft.com/office/drawing/2014/main" id="{1B498694-B5AE-4BFD-9CA9-EABF4E11F951}"/>
-              </a:ext>
-            </a:extLst>
-          </p:cNvPr>
-          <p:cNvSpPr>
-            <a:spLocks xmlns:a="http://schemas.openxmlformats.org/drawingml/2006/main" noGrp="1"/>
-          </p:cNvSpPr>
-          <p:nvPr/>
-        </p:nvSpPr>
-        <p:spPr>
-          <a:xfrm xmlns:a="http://schemas.openxmlformats.org/drawingml/2006/main">
-            <a:off x="1000125" y="3762375"/>
-            <a:ext cx="476250" cy="419100"/>
+                <a16:creationId xmlns:a16="http://schemas.microsoft.com/office/drawing/2014/main" id="{EAC12832-D04C-4B26-9ED1-471814D5E2A7}"/>
+              </a:ext>
+            </a:extLst>
+          </p:cNvPr>
+          <p:cNvSpPr>
+            <a:spLocks xmlns:a="http://schemas.openxmlformats.org/drawingml/2006/main" noGrp="1"/>
+          </p:cNvSpPr>
+          <p:nvPr/>
+        </p:nvSpPr>
+        <p:spPr>
+          <a:xfrm xmlns:a="http://schemas.openxmlformats.org/drawingml/2006/main">
+            <a:off x="1162050" y="3609975"/>
+            <a:ext cx="400050" cy="400050"/>
           </a:xfrm>
           <a:prstGeom xmlns:a="http://schemas.openxmlformats.org/drawingml/2006/main" prst="rect">
             <a:avLst/>
@@ -8614,9 +8620,9 @@
           <a:lstStyle xmlns:a="http://schemas.openxmlformats.org/drawingml/2006/main"/>
           <a:p xmlns:a="http://schemas.openxmlformats.org/drawingml/2006/main">
             <a:pPr algn="ctr">
-              <a:defRPr sz="1350" b="1">
-                <a:solidFill>
-                  <a:srgbClr val="FFFFFF"/>
+              <a:defRPr sz="1125" b="1">
+                <a:solidFill>
+                  <a:srgbClr val="2C6E73"/>
                 </a:solidFill>
                 <a:latin typeface="Arial"/>
                 <a:ea typeface="Arial"/>
@@ -8624,9 +8630,9 @@
               </a:defRPr>
             </a:pPr>
             <a:r>
-              <a:rPr sz="1350" b="1">
-                <a:solidFill>
-                  <a:srgbClr val="FFFFFF"/>
+              <a:rPr sz="1125" b="1">
+                <a:solidFill>
+                  <a:srgbClr val="2C6E73"/>
                 </a:solidFill>
                 <a:latin typeface="Arial"/>
                 <a:ea typeface="Arial"/>
@@ -8642,19 +8648,19 @@
           <p:cNvPr id="19" name="">
             <a:extLst xmlns:a="http://schemas.openxmlformats.org/drawingml/2006/main">
               <a:ext uri="{FF2B5EF4-FFF2-40B4-BE49-F238E27FC236}">
-                <a16:creationId xmlns:a16="http://schemas.microsoft.com/office/drawing/2014/main" id="{13ACF823-B501-4510-846C-C3DF2346CEBA}"/>
-              </a:ext>
-            </a:extLst>
-          </p:cNvPr>
-          <p:cNvSpPr>
-            <a:spLocks xmlns:a="http://schemas.openxmlformats.org/drawingml/2006/main" noGrp="1"/>
-          </p:cNvSpPr>
-          <p:nvPr/>
-        </p:nvSpPr>
-        <p:spPr>
-          <a:xfrm xmlns:a="http://schemas.openxmlformats.org/drawingml/2006/main">
-            <a:off x="1714500" y="3667125"/>
-            <a:ext cx="9429750" cy="609600"/>
+                <a16:creationId xmlns:a16="http://schemas.microsoft.com/office/drawing/2014/main" id="{0981BAEB-28F1-46F8-BDF7-AEB1AF5668AE}"/>
+              </a:ext>
+            </a:extLst>
+          </p:cNvPr>
+          <p:cNvSpPr>
+            <a:spLocks xmlns:a="http://schemas.openxmlformats.org/drawingml/2006/main" noGrp="1"/>
+          </p:cNvSpPr>
+          <p:nvPr/>
+        </p:nvSpPr>
+        <p:spPr>
+          <a:xfrm xmlns:a="http://schemas.openxmlformats.org/drawingml/2006/main">
+            <a:off x="1714500" y="3524250"/>
+            <a:ext cx="9525000" cy="638175"/>
           </a:xfrm>
           <a:prstGeom xmlns:a="http://schemas.openxmlformats.org/drawingml/2006/main" prst="rect">
             <a:avLst/>
@@ -8671,7 +8677,7 @@
           <a:lstStyle xmlns:a="http://schemas.openxmlformats.org/drawingml/2006/main"/>
           <a:p xmlns:a="http://schemas.openxmlformats.org/drawingml/2006/main">
             <a:pPr algn="l">
-              <a:defRPr sz="1500" b="0">
+              <a:defRPr sz="1575" b="0">
                 <a:solidFill>
                   <a:srgbClr val="17253A"/>
                 </a:solidFill>
@@ -8681,7 +8687,7 @@
               </a:defRPr>
             </a:pPr>
             <a:r>
-              <a:rPr sz="1500" b="0">
+              <a:rPr sz="1575" b="0">
                 <a:solidFill>
                   <a:srgbClr val="17253A"/>
                 </a:solidFill>
@@ -8689,7 +8695,7 @@
                 <a:ea typeface="Arial"/>
                 <a:cs typeface="Arial"/>
               </a:rPr>
-              <a:t>Complete the calculation: 2/3, 3/4, 5/6.</a:t>
+              <a:t>2/3 = 8/12     3/4 = 9/12     5/6 = 10/12</a:t>
             </a:r>
           </a:p>
         </p:txBody>
@@ -8699,28 +8705,30 @@
           <p:cNvPr id="20" name="">
             <a:extLst xmlns:a="http://schemas.openxmlformats.org/drawingml/2006/main">
               <a:ext uri="{FF2B5EF4-FFF2-40B4-BE49-F238E27FC236}">
-                <a16:creationId xmlns:a16="http://schemas.microsoft.com/office/drawing/2014/main" id="{4282A97A-C4D9-4026-ABFC-D5FD84FA5B19}"/>
-              </a:ext>
-            </a:extLst>
-          </p:cNvPr>
-          <p:cNvSpPr>
-            <a:spLocks xmlns:a="http://schemas.openxmlformats.org/drawingml/2006/main" noGrp="1"/>
-          </p:cNvSpPr>
-          <p:nvPr/>
-        </p:nvSpPr>
-        <p:spPr>
-          <a:xfrm xmlns:a="http://schemas.openxmlformats.org/drawingml/2006/main">
-            <a:off x="1000125" y="4476750"/>
-            <a:ext cx="476250" cy="476250"/>
-          </a:xfrm>
-          <a:prstGeom xmlns:a="http://schemas.openxmlformats.org/drawingml/2006/main" prst="ellipse">
+                <a16:creationId xmlns:a16="http://schemas.microsoft.com/office/drawing/2014/main" id="{FE62D04F-9ED8-4F8C-AD8C-38055B828220}"/>
+              </a:ext>
+            </a:extLst>
+          </p:cNvPr>
+          <p:cNvSpPr>
+            <a:spLocks xmlns:a="http://schemas.openxmlformats.org/drawingml/2006/main" noGrp="1"/>
+          </p:cNvSpPr>
+          <p:nvPr/>
+        </p:nvSpPr>
+        <p:spPr>
+          <a:xfrm xmlns:a="http://schemas.openxmlformats.org/drawingml/2006/main">
+            <a:off x="1714500" y="4181475"/>
+            <a:ext cx="9334500" cy="9525"/>
+          </a:xfrm>
+          <a:prstGeom xmlns:a="http://schemas.openxmlformats.org/drawingml/2006/main" prst="rect">
             <a:avLst/>
           </a:prstGeom>
           <a:solidFill xmlns:a="http://schemas.openxmlformats.org/drawingml/2006/main">
-            <a:srgbClr val="2C6E73"/>
+            <a:srgbClr val="D9E0E6"/>
           </a:solidFill>
           <a:ln xmlns:a="http://schemas.openxmlformats.org/drawingml/2006/main" w="0">
-            <a:noFill/>
+            <a:solidFill>
+              <a:srgbClr val="D9E0E6"/>
+            </a:solidFill>
           </a:ln>
         </p:spPr>
       </p:sp>
@@ -8729,19 +8737,19 @@
           <p:cNvPr id="21" name="">
             <a:extLst xmlns:a="http://schemas.openxmlformats.org/drawingml/2006/main">
               <a:ext uri="{FF2B5EF4-FFF2-40B4-BE49-F238E27FC236}">
-                <a16:creationId xmlns:a16="http://schemas.microsoft.com/office/drawing/2014/main" id="{4B3FAC19-219C-4EC5-A990-E0F75A886BCF}"/>
-              </a:ext>
-            </a:extLst>
-          </p:cNvPr>
-          <p:cNvSpPr>
-            <a:spLocks xmlns:a="http://schemas.openxmlformats.org/drawingml/2006/main" noGrp="1"/>
-          </p:cNvSpPr>
-          <p:nvPr/>
-        </p:nvSpPr>
-        <p:spPr>
-          <a:xfrm xmlns:a="http://schemas.openxmlformats.org/drawingml/2006/main">
-            <a:off x="1000125" y="4505325"/>
-            <a:ext cx="476250" cy="419100"/>
+                <a16:creationId xmlns:a16="http://schemas.microsoft.com/office/drawing/2014/main" id="{CF347DD5-D0CC-48A8-9029-8B88F8417596}"/>
+              </a:ext>
+            </a:extLst>
+          </p:cNvPr>
+          <p:cNvSpPr>
+            <a:spLocks xmlns:a="http://schemas.openxmlformats.org/drawingml/2006/main" noGrp="1"/>
+          </p:cNvSpPr>
+          <p:nvPr/>
+        </p:nvSpPr>
+        <p:spPr>
+          <a:xfrm xmlns:a="http://schemas.openxmlformats.org/drawingml/2006/main">
+            <a:off x="1162050" y="4314825"/>
+            <a:ext cx="400050" cy="400050"/>
           </a:xfrm>
           <a:prstGeom xmlns:a="http://schemas.openxmlformats.org/drawingml/2006/main" prst="rect">
             <a:avLst/>
@@ -8758,9 +8766,9 @@
           <a:lstStyle xmlns:a="http://schemas.openxmlformats.org/drawingml/2006/main"/>
           <a:p xmlns:a="http://schemas.openxmlformats.org/drawingml/2006/main">
             <a:pPr algn="ctr">
-              <a:defRPr sz="1350" b="1">
-                <a:solidFill>
-                  <a:srgbClr val="FFFFFF"/>
+              <a:defRPr sz="1125" b="1">
+                <a:solidFill>
+                  <a:srgbClr val="2C6E73"/>
                 </a:solidFill>
                 <a:latin typeface="Arial"/>
                 <a:ea typeface="Arial"/>
@@ -8768,9 +8776,9 @@
               </a:defRPr>
             </a:pPr>
             <a:r>
-              <a:rPr sz="1350" b="1">
-                <a:solidFill>
-                  <a:srgbClr val="FFFFFF"/>
+              <a:rPr sz="1125" b="1">
+                <a:solidFill>
+                  <a:srgbClr val="2C6E73"/>
                 </a:solidFill>
                 <a:latin typeface="Arial"/>
                 <a:ea typeface="Arial"/>
@@ -8786,19 +8794,19 @@
           <p:cNvPr id="22" name="">
             <a:extLst xmlns:a="http://schemas.openxmlformats.org/drawingml/2006/main">
               <a:ext uri="{FF2B5EF4-FFF2-40B4-BE49-F238E27FC236}">
-                <a16:creationId xmlns:a16="http://schemas.microsoft.com/office/drawing/2014/main" id="{BCCE58BB-80D7-4756-AB14-0D54E693BD4F}"/>
-              </a:ext>
-            </a:extLst>
-          </p:cNvPr>
-          <p:cNvSpPr>
-            <a:spLocks xmlns:a="http://schemas.openxmlformats.org/drawingml/2006/main" noGrp="1"/>
-          </p:cNvSpPr>
-          <p:nvPr/>
-        </p:nvSpPr>
-        <p:spPr>
-          <a:xfrm xmlns:a="http://schemas.openxmlformats.org/drawingml/2006/main">
-            <a:off x="1714500" y="4410075"/>
-            <a:ext cx="9429750" cy="609600"/>
+                <a16:creationId xmlns:a16="http://schemas.microsoft.com/office/drawing/2014/main" id="{11153ACB-EB14-462F-8BFF-8911DB451D12}"/>
+              </a:ext>
+            </a:extLst>
+          </p:cNvPr>
+          <p:cNvSpPr>
+            <a:spLocks xmlns:a="http://schemas.openxmlformats.org/drawingml/2006/main" noGrp="1"/>
+          </p:cNvSpPr>
+          <p:nvPr/>
+        </p:nvSpPr>
+        <p:spPr>
+          <a:xfrm xmlns:a="http://schemas.openxmlformats.org/drawingml/2006/main">
+            <a:off x="1714500" y="4229100"/>
+            <a:ext cx="9525000" cy="638175"/>
           </a:xfrm>
           <a:prstGeom xmlns:a="http://schemas.openxmlformats.org/drawingml/2006/main" prst="rect">
             <a:avLst/>
@@ -8815,9 +8823,9 @@
           <a:lstStyle xmlns:a="http://schemas.openxmlformats.org/drawingml/2006/main"/>
           <a:p xmlns:a="http://schemas.openxmlformats.org/drawingml/2006/main">
             <a:pPr algn="l">
-              <a:defRPr sz="1500" b="1">
-                <a:solidFill>
-                  <a:srgbClr val="2F785D"/>
+              <a:defRPr sz="1575" b="0">
+                <a:solidFill>
+                  <a:srgbClr val="17253A"/>
                 </a:solidFill>
                 <a:latin typeface="Arial"/>
                 <a:ea typeface="Arial"/>
@@ -8825,15 +8833,161 @@
               </a:defRPr>
             </a:pPr>
             <a:r>
-              <a:rPr sz="1500" b="1">
+              <a:rPr sz="1575" b="0">
+                <a:solidFill>
+                  <a:srgbClr val="17253A"/>
+                </a:solidFill>
+                <a:latin typeface="Arial"/>
+                <a:ea typeface="Arial"/>
+                <a:cs typeface="Arial"/>
+              </a:rPr>
+              <a:t>8/12 &lt; 9/12 &lt; 10/12</a:t>
+            </a:r>
+          </a:p>
+        </p:txBody>
+      </p:sp>
+      <p:sp>
+        <p:nvSpPr>
+          <p:cNvPr id="23" name="">
+            <a:extLst xmlns:a="http://schemas.openxmlformats.org/drawingml/2006/main">
+              <a:ext uri="{FF2B5EF4-FFF2-40B4-BE49-F238E27FC236}">
+                <a16:creationId xmlns:a16="http://schemas.microsoft.com/office/drawing/2014/main" id="{5F61CD8F-E726-4FBC-A16E-B9AC91B29E78}"/>
+              </a:ext>
+            </a:extLst>
+          </p:cNvPr>
+          <p:cNvSpPr>
+            <a:spLocks xmlns:a="http://schemas.openxmlformats.org/drawingml/2006/main" noGrp="1"/>
+          </p:cNvSpPr>
+          <p:nvPr/>
+        </p:nvSpPr>
+        <p:spPr>
+          <a:xfrm xmlns:a="http://schemas.openxmlformats.org/drawingml/2006/main">
+            <a:off x="1714500" y="4886325"/>
+            <a:ext cx="9334500" cy="9525"/>
+          </a:xfrm>
+          <a:prstGeom xmlns:a="http://schemas.openxmlformats.org/drawingml/2006/main" prst="rect">
+            <a:avLst/>
+          </a:prstGeom>
+          <a:solidFill xmlns:a="http://schemas.openxmlformats.org/drawingml/2006/main">
+            <a:srgbClr val="D9E0E6"/>
+          </a:solidFill>
+          <a:ln xmlns:a="http://schemas.openxmlformats.org/drawingml/2006/main" w="0">
+            <a:solidFill>
+              <a:srgbClr val="D9E0E6"/>
+            </a:solidFill>
+          </a:ln>
+        </p:spPr>
+      </p:sp>
+      <p:sp>
+        <p:nvSpPr>
+          <p:cNvPr id="24" name="">
+            <a:extLst xmlns:a="http://schemas.openxmlformats.org/drawingml/2006/main">
+              <a:ext uri="{FF2B5EF4-FFF2-40B4-BE49-F238E27FC236}">
+                <a16:creationId xmlns:a16="http://schemas.microsoft.com/office/drawing/2014/main" id="{E6823FF3-6001-4574-95E3-8EAF58063C66}"/>
+              </a:ext>
+            </a:extLst>
+          </p:cNvPr>
+          <p:cNvSpPr>
+            <a:spLocks xmlns:a="http://schemas.openxmlformats.org/drawingml/2006/main" noGrp="1"/>
+          </p:cNvSpPr>
+          <p:nvPr/>
+        </p:nvSpPr>
+        <p:spPr>
+          <a:xfrm xmlns:a="http://schemas.openxmlformats.org/drawingml/2006/main">
+            <a:off x="1162050" y="5019675"/>
+            <a:ext cx="400050" cy="400050"/>
+          </a:xfrm>
+          <a:prstGeom xmlns:a="http://schemas.openxmlformats.org/drawingml/2006/main" prst="rect">
+            <a:avLst/>
+          </a:prstGeom>
+          <a:noFill xmlns:a="http://schemas.openxmlformats.org/drawingml/2006/main"/>
+          <a:ln xmlns:a="http://schemas.openxmlformats.org/drawingml/2006/main" w="0">
+            <a:noFill/>
+          </a:ln>
+        </p:spPr>
+        <p:txBody>
+          <a:bodyPr xmlns:a="http://schemas.openxmlformats.org/drawingml/2006/main" anchor="ctr">
+            <a:normAutofit fontScale="100000"/>
+          </a:bodyPr>
+          <a:lstStyle xmlns:a="http://schemas.openxmlformats.org/drawingml/2006/main"/>
+          <a:p xmlns:a="http://schemas.openxmlformats.org/drawingml/2006/main">
+            <a:pPr algn="ctr">
+              <a:defRPr sz="1125" b="1">
                 <a:solidFill>
                   <a:srgbClr val="2F785D"/>
                 </a:solidFill>
                 <a:latin typeface="Arial"/>
                 <a:ea typeface="Arial"/>
                 <a:cs typeface="Arial"/>
+              </a:defRPr>
+            </a:pPr>
+            <a:r>
+              <a:rPr sz="1125" b="1">
+                <a:solidFill>
+                  <a:srgbClr val="2F785D"/>
+                </a:solidFill>
+                <a:latin typeface="Arial"/>
+                <a:ea typeface="Arial"/>
+                <a:cs typeface="Arial"/>
               </a:rPr>
-              <a:t>Check the result: Compare the new forms and justify the conclusion.</a:t>
+              <a:t>5</a:t>
+            </a:r>
+          </a:p>
+        </p:txBody>
+      </p:sp>
+      <p:sp>
+        <p:nvSpPr>
+          <p:cNvPr id="25" name="">
+            <a:extLst xmlns:a="http://schemas.openxmlformats.org/drawingml/2006/main">
+              <a:ext uri="{FF2B5EF4-FFF2-40B4-BE49-F238E27FC236}">
+                <a16:creationId xmlns:a16="http://schemas.microsoft.com/office/drawing/2014/main" id="{10CBFB27-FD20-4176-B4CD-87306B6F789E}"/>
+              </a:ext>
+            </a:extLst>
+          </p:cNvPr>
+          <p:cNvSpPr>
+            <a:spLocks xmlns:a="http://schemas.openxmlformats.org/drawingml/2006/main" noGrp="1"/>
+          </p:cNvSpPr>
+          <p:nvPr/>
+        </p:nvSpPr>
+        <p:spPr>
+          <a:xfrm xmlns:a="http://schemas.openxmlformats.org/drawingml/2006/main">
+            <a:off x="1714500" y="4933950"/>
+            <a:ext cx="9525000" cy="638175"/>
+          </a:xfrm>
+          <a:prstGeom xmlns:a="http://schemas.openxmlformats.org/drawingml/2006/main" prst="rect">
+            <a:avLst/>
+          </a:prstGeom>
+          <a:noFill xmlns:a="http://schemas.openxmlformats.org/drawingml/2006/main"/>
+          <a:ln xmlns:a="http://schemas.openxmlformats.org/drawingml/2006/main" w="0">
+            <a:noFill/>
+          </a:ln>
+        </p:spPr>
+        <p:txBody>
+          <a:bodyPr xmlns:a="http://schemas.openxmlformats.org/drawingml/2006/main" anchor="ctr">
+            <a:normAutofit fontScale="100000"/>
+          </a:bodyPr>
+          <a:lstStyle xmlns:a="http://schemas.openxmlformats.org/drawingml/2006/main"/>
+          <a:p xmlns:a="http://schemas.openxmlformats.org/drawingml/2006/main">
+            <a:pPr algn="l">
+              <a:defRPr sz="1575" b="1">
+                <a:solidFill>
+                  <a:srgbClr val="2F785D"/>
+                </a:solidFill>
+                <a:latin typeface="Arial"/>
+                <a:ea typeface="Arial"/>
+                <a:cs typeface="Arial"/>
+              </a:defRPr>
+            </a:pPr>
+            <a:r>
+              <a:rPr sz="1575" b="1">
+                <a:solidFill>
+                  <a:srgbClr val="2F785D"/>
+                </a:solidFill>
+                <a:latin typeface="Arial"/>
+                <a:ea typeface="Arial"/>
+                <a:cs typeface="Arial"/>
+              </a:rPr>
+              <a:t>2/3, 3/4, 5/6</a:t>
             </a:r>
           </a:p>
         </p:txBody>
@@ -8841,7 +8995,7 @@
     </p:spTree>
     <p:extLst>
       <p:ext uri="{BB962C8B-B14F-4D97-AF65-F5344CB8AC3E}">
-        <p14:creationId xmlns:p14="http://schemas.microsoft.com/office/powerpoint/2010/main" val="605808851"/>
+        <p14:creationId xmlns:p14="http://schemas.microsoft.com/office/powerpoint/2010/main" val="1270501157"/>
       </p:ext>
     </p:extLst>
   </p:cSld>
@@ -9078,6 +9232,51 @@
                       </p:childTnLst>
                     </p:cTn>
                   </p:par>
+                  <p:par>
+                    <p:cTn id="23" fill="hold">
+                      <p:stCondLst>
+                        <p:cond delay="indefinite"/>
+                      </p:stCondLst>
+                      <p:childTnLst>
+                        <p:par>
+                          <p:cTn id="24" fill="hold">
+                            <p:stCondLst>
+                              <p:cond delay="0"/>
+                            </p:stCondLst>
+                            <p:childTnLst>
+                              <p:par>
+                                <p:cTn id="25" presetID="1" presetClass="entr" presetSubtype="0" fill="hold" grpId="0" nodeType="clickEffect">
+                                  <p:stCondLst>
+                                    <p:cond delay="0"/>
+                                  </p:stCondLst>
+                                  <p:childTnLst>
+                                    <p:set>
+                                      <p:cBhvr>
+                                        <p:cTn id="26" dur="1" fill="hold">
+                                          <p:stCondLst>
+                                            <p:cond delay="0"/>
+                                          </p:stCondLst>
+                                        </p:cTn>
+                                        <p:tgtEl>
+                                          <p:spTgt spid="25"/>
+                                        </p:tgtEl>
+                                        <p:attrNameLst>
+                                          <p:attrName>style.visibility</p:attrName>
+                                        </p:attrNameLst>
+                                      </p:cBhvr>
+                                      <p:to>
+                                        <p:strVal val="visible"/>
+                                      </p:to>
+                                    </p:set>
+                                  </p:childTnLst>
+                                </p:cTn>
+                              </p:par>
+                            </p:childTnLst>
+                          </p:cTn>
+                        </p:par>
+                      </p:childTnLst>
+                    </p:cTn>
+                  </p:par>
                 </p:childTnLst>
               </p:cTn>
               <p:prevCondLst>
@@ -9105,6 +9304,7 @@
       <p:bldP spid="16" grpId="0"/>
       <p:bldP spid="19" grpId="0"/>
       <p:bldP spid="22" grpId="0"/>
+      <p:bldP spid="25" grpId="0"/>
     </p:bldLst>
   </p:timing>
 </p:sld>
@@ -9134,7 +9334,7 @@
           <p:cNvPr id="15" name="">
             <a:extLst xmlns:a="http://schemas.openxmlformats.org/drawingml/2006/main">
               <a:ext uri="{FF2B5EF4-FFF2-40B4-BE49-F238E27FC236}">
-                <a16:creationId xmlns:a16="http://schemas.microsoft.com/office/drawing/2014/main" id="{5519E3EB-D744-4A64-BB51-227F9626CBC2}"/>
+                <a16:creationId xmlns:a16="http://schemas.microsoft.com/office/drawing/2014/main" id="{6B8B221E-B251-4957-9E46-12FD7AFAC5ED}"/>
               </a:ext>
             </a:extLst>
           </p:cNvPr>
@@ -9166,7 +9366,7 @@
           <p:cNvPr id="2" name="">
             <a:extLst xmlns:a="http://schemas.openxmlformats.org/drawingml/2006/main">
               <a:ext uri="{FF2B5EF4-FFF2-40B4-BE49-F238E27FC236}">
-                <a16:creationId xmlns:a16="http://schemas.microsoft.com/office/drawing/2014/main" id="{7B6BEF8D-26B1-4A2D-A5E4-EBB1E4ED29BD}"/>
+                <a16:creationId xmlns:a16="http://schemas.microsoft.com/office/drawing/2014/main" id="{E0A32720-51BB-425F-BE4F-3F41155ECFB9}"/>
               </a:ext>
             </a:extLst>
           </p:cNvPr>
@@ -9223,7 +9423,7 @@
           <p:cNvPr id="3" name="">
             <a:extLst xmlns:a="http://schemas.openxmlformats.org/drawingml/2006/main">
               <a:ext uri="{FF2B5EF4-FFF2-40B4-BE49-F238E27FC236}">
-                <a16:creationId xmlns:a16="http://schemas.microsoft.com/office/drawing/2014/main" id="{2016997B-A31D-4E7F-97B1-C7D3FCF8ABEA}"/>
+                <a16:creationId xmlns:a16="http://schemas.microsoft.com/office/drawing/2014/main" id="{8A2BBC92-943F-4EFB-AC82-A0ABDC3C42E2}"/>
               </a:ext>
             </a:extLst>
           </p:cNvPr>
@@ -9255,7 +9455,7 @@
           <p:cNvPr id="4" name="">
             <a:extLst xmlns:a="http://schemas.openxmlformats.org/drawingml/2006/main">
               <a:ext uri="{FF2B5EF4-FFF2-40B4-BE49-F238E27FC236}">
-                <a16:creationId xmlns:a16="http://schemas.microsoft.com/office/drawing/2014/main" id="{E03B4E28-49E9-4B39-AB72-FCBD317A3931}"/>
+                <a16:creationId xmlns:a16="http://schemas.microsoft.com/office/drawing/2014/main" id="{72ED5697-A760-4F91-8BD9-CC29CB24FD69}"/>
               </a:ext>
             </a:extLst>
           </p:cNvPr>
@@ -9312,7 +9512,7 @@
           <p:cNvPr id="5" name="">
             <a:extLst xmlns:a="http://schemas.openxmlformats.org/drawingml/2006/main">
               <a:ext uri="{FF2B5EF4-FFF2-40B4-BE49-F238E27FC236}">
-                <a16:creationId xmlns:a16="http://schemas.microsoft.com/office/drawing/2014/main" id="{8E3C3C0E-55B3-43BC-8123-7C16D7E85284}"/>
+                <a16:creationId xmlns:a16="http://schemas.microsoft.com/office/drawing/2014/main" id="{1506421F-1406-4851-9984-887F9B9A6C4D}"/>
               </a:ext>
             </a:extLst>
           </p:cNvPr>
@@ -9369,7 +9569,7 @@
           <p:cNvPr id="6" name="">
             <a:extLst xmlns:a="http://schemas.openxmlformats.org/drawingml/2006/main">
               <a:ext uri="{FF2B5EF4-FFF2-40B4-BE49-F238E27FC236}">
-                <a16:creationId xmlns:a16="http://schemas.microsoft.com/office/drawing/2014/main" id="{1D91A1EE-33E1-41B9-BC14-A9692B1DF87C}"/>
+                <a16:creationId xmlns:a16="http://schemas.microsoft.com/office/drawing/2014/main" id="{CF95BDD7-10A1-4B03-A186-A55ABCF6D517}"/>
               </a:ext>
             </a:extLst>
           </p:cNvPr>
@@ -9426,7 +9626,7 @@
           <p:cNvPr id="7" name="">
             <a:extLst xmlns:a="http://schemas.openxmlformats.org/drawingml/2006/main">
               <a:ext uri="{FF2B5EF4-FFF2-40B4-BE49-F238E27FC236}">
-                <a16:creationId xmlns:a16="http://schemas.microsoft.com/office/drawing/2014/main" id="{4724253E-B4F7-42BA-9145-F2D290343A97}"/>
+                <a16:creationId xmlns:a16="http://schemas.microsoft.com/office/drawing/2014/main" id="{0C224303-1F9C-4F3E-AF65-054896FC692C}"/>
               </a:ext>
             </a:extLst>
           </p:cNvPr>
@@ -9458,7 +9658,7 @@
           <p:cNvPr id="8" name="">
             <a:extLst xmlns:a="http://schemas.openxmlformats.org/drawingml/2006/main">
               <a:ext uri="{FF2B5EF4-FFF2-40B4-BE49-F238E27FC236}">
-                <a16:creationId xmlns:a16="http://schemas.microsoft.com/office/drawing/2014/main" id="{EDEF399D-423F-43B9-8873-6E414E5CE601}"/>
+                <a16:creationId xmlns:a16="http://schemas.microsoft.com/office/drawing/2014/main" id="{2FC7B2B1-7A54-411D-BCEA-389FD2FD0BA1}"/>
               </a:ext>
             </a:extLst>
           </p:cNvPr>
@@ -9515,7 +9715,7 @@
           <p:cNvPr id="9" name="">
             <a:extLst xmlns:a="http://schemas.openxmlformats.org/drawingml/2006/main">
               <a:ext uri="{FF2B5EF4-FFF2-40B4-BE49-F238E27FC236}">
-                <a16:creationId xmlns:a16="http://schemas.microsoft.com/office/drawing/2014/main" id="{49B3C731-D8F2-45BA-AA9C-A33209951FF0}"/>
+                <a16:creationId xmlns:a16="http://schemas.microsoft.com/office/drawing/2014/main" id="{6222B711-EEBD-4998-B928-BFB91FB7B50D}"/>
               </a:ext>
             </a:extLst>
           </p:cNvPr>
@@ -9572,7 +9772,7 @@
           <p:cNvPr id="10" name="">
             <a:extLst xmlns:a="http://schemas.openxmlformats.org/drawingml/2006/main">
               <a:ext uri="{FF2B5EF4-FFF2-40B4-BE49-F238E27FC236}">
-                <a16:creationId xmlns:a16="http://schemas.microsoft.com/office/drawing/2014/main" id="{DA2262BA-83F0-4A23-A8EE-33F4AA7740B9}"/>
+                <a16:creationId xmlns:a16="http://schemas.microsoft.com/office/drawing/2014/main" id="{D89D31B0-CB55-4756-822D-D693ED343753}"/>
               </a:ext>
             </a:extLst>
           </p:cNvPr>
@@ -9629,7 +9829,7 @@
           <p:cNvPr id="11" name="">
             <a:extLst xmlns:a="http://schemas.openxmlformats.org/drawingml/2006/main">
               <a:ext uri="{FF2B5EF4-FFF2-40B4-BE49-F238E27FC236}">
-                <a16:creationId xmlns:a16="http://schemas.microsoft.com/office/drawing/2014/main" id="{BA3F4F22-60CC-4DA5-9C0D-E28CC02EE91A}"/>
+                <a16:creationId xmlns:a16="http://schemas.microsoft.com/office/drawing/2014/main" id="{29DFDD0B-F6F2-433E-B269-D85987A3F072}"/>
               </a:ext>
             </a:extLst>
           </p:cNvPr>
@@ -9686,7 +9886,7 @@
           <p:cNvPr id="12" name="">
             <a:extLst xmlns:a="http://schemas.openxmlformats.org/drawingml/2006/main">
               <a:ext uri="{FF2B5EF4-FFF2-40B4-BE49-F238E27FC236}">
-                <a16:creationId xmlns:a16="http://schemas.microsoft.com/office/drawing/2014/main" id="{A778ECD8-0756-4F15-AA16-E13EFEF5F24C}"/>
+                <a16:creationId xmlns:a16="http://schemas.microsoft.com/office/drawing/2014/main" id="{7BA386E0-C9B7-4AB1-AF70-6C93670AA319}"/>
               </a:ext>
             </a:extLst>
           </p:cNvPr>
@@ -9718,7 +9918,7 @@
           <p:cNvPr id="13" name="">
             <a:extLst xmlns:a="http://schemas.openxmlformats.org/drawingml/2006/main">
               <a:ext uri="{FF2B5EF4-FFF2-40B4-BE49-F238E27FC236}">
-                <a16:creationId xmlns:a16="http://schemas.microsoft.com/office/drawing/2014/main" id="{AA172C96-3E9A-42E9-95CB-4224E91A79FC}"/>
+                <a16:creationId xmlns:a16="http://schemas.microsoft.com/office/drawing/2014/main" id="{C509A4B5-A2DB-401A-B7AB-6C87BA0820CC}"/>
               </a:ext>
             </a:extLst>
           </p:cNvPr>
@@ -9775,7 +9975,7 @@
           <p:cNvPr id="14" name="">
             <a:extLst xmlns:a="http://schemas.openxmlformats.org/drawingml/2006/main">
               <a:ext uri="{FF2B5EF4-FFF2-40B4-BE49-F238E27FC236}">
-                <a16:creationId xmlns:a16="http://schemas.microsoft.com/office/drawing/2014/main" id="{BB4EAF6D-36FA-48BF-ADFD-599F06C1490F}"/>
+                <a16:creationId xmlns:a16="http://schemas.microsoft.com/office/drawing/2014/main" id="{78D98262-062E-4796-8A83-71CA3A745662}"/>
               </a:ext>
             </a:extLst>
           </p:cNvPr>
@@ -9830,7 +10030,7 @@
     </p:spTree>
     <p:extLst>
       <p:ext uri="{BB962C8B-B14F-4D97-AF65-F5344CB8AC3E}">
-        <p14:creationId xmlns:p14="http://schemas.microsoft.com/office/powerpoint/2010/main" val="26676208"/>
+        <p14:creationId xmlns:p14="http://schemas.microsoft.com/office/powerpoint/2010/main" val="481632484"/>
       </p:ext>
     </p:extLst>
   </p:cSld>
@@ -10031,7 +10231,7 @@
           <p:cNvPr id="16" name="">
             <a:extLst xmlns:a="http://schemas.openxmlformats.org/drawingml/2006/main">
               <a:ext uri="{FF2B5EF4-FFF2-40B4-BE49-F238E27FC236}">
-                <a16:creationId xmlns:a16="http://schemas.microsoft.com/office/drawing/2014/main" id="{4CCA7FA7-C358-4FE7-91FB-2CD2BEC8626C}"/>
+                <a16:creationId xmlns:a16="http://schemas.microsoft.com/office/drawing/2014/main" id="{DC8BF251-87A5-433B-9685-8E2A4C4F6BD0}"/>
               </a:ext>
             </a:extLst>
           </p:cNvPr>
@@ -10063,7 +10263,7 @@
           <p:cNvPr id="2" name="">
             <a:extLst xmlns:a="http://schemas.openxmlformats.org/drawingml/2006/main">
               <a:ext uri="{FF2B5EF4-FFF2-40B4-BE49-F238E27FC236}">
-                <a16:creationId xmlns:a16="http://schemas.microsoft.com/office/drawing/2014/main" id="{E123982A-E475-47FC-BCAE-4D56147A60B2}"/>
+                <a16:creationId xmlns:a16="http://schemas.microsoft.com/office/drawing/2014/main" id="{7D87CCE5-04BC-4163-BDA1-6819F9E4A7C7}"/>
               </a:ext>
             </a:extLst>
           </p:cNvPr>
@@ -10120,7 +10320,7 @@
           <p:cNvPr id="3" name="">
             <a:extLst xmlns:a="http://schemas.openxmlformats.org/drawingml/2006/main">
               <a:ext uri="{FF2B5EF4-FFF2-40B4-BE49-F238E27FC236}">
-                <a16:creationId xmlns:a16="http://schemas.microsoft.com/office/drawing/2014/main" id="{6889C4EC-E430-47E1-9C85-258F11FC0D5C}"/>
+                <a16:creationId xmlns:a16="http://schemas.microsoft.com/office/drawing/2014/main" id="{6B4EDC85-90A2-4DEE-ACEA-582A0BA15AB4}"/>
               </a:ext>
             </a:extLst>
           </p:cNvPr>
@@ -10152,7 +10352,7 @@
           <p:cNvPr id="4" name="">
             <a:extLst xmlns:a="http://schemas.openxmlformats.org/drawingml/2006/main">
               <a:ext uri="{FF2B5EF4-FFF2-40B4-BE49-F238E27FC236}">
-                <a16:creationId xmlns:a16="http://schemas.microsoft.com/office/drawing/2014/main" id="{5BCF5189-C492-48E4-AAD0-1CFD45985F4D}"/>
+                <a16:creationId xmlns:a16="http://schemas.microsoft.com/office/drawing/2014/main" id="{925AF91C-76BC-45B8-BAD8-A1830A8E3DDA}"/>
               </a:ext>
             </a:extLst>
           </p:cNvPr>
@@ -10209,7 +10409,7 @@
           <p:cNvPr id="5" name="">
             <a:extLst xmlns:a="http://schemas.openxmlformats.org/drawingml/2006/main">
               <a:ext uri="{FF2B5EF4-FFF2-40B4-BE49-F238E27FC236}">
-                <a16:creationId xmlns:a16="http://schemas.microsoft.com/office/drawing/2014/main" id="{7F98FA41-8856-4152-8BFD-D29AE48E14C7}"/>
+                <a16:creationId xmlns:a16="http://schemas.microsoft.com/office/drawing/2014/main" id="{E2B6A64E-5322-446D-BD7D-4EE1D0E92BBC}"/>
               </a:ext>
             </a:extLst>
           </p:cNvPr>
@@ -10266,7 +10466,7 @@
           <p:cNvPr id="6" name="">
             <a:extLst xmlns:a="http://schemas.openxmlformats.org/drawingml/2006/main">
               <a:ext uri="{FF2B5EF4-FFF2-40B4-BE49-F238E27FC236}">
-                <a16:creationId xmlns:a16="http://schemas.microsoft.com/office/drawing/2014/main" id="{76793684-5B35-40BE-88C0-139086B386F2}"/>
+                <a16:creationId xmlns:a16="http://schemas.microsoft.com/office/drawing/2014/main" id="{5FA19996-F15E-4F3C-952E-588BBC887DAB}"/>
               </a:ext>
             </a:extLst>
           </p:cNvPr>
@@ -10323,7 +10523,7 @@
           <p:cNvPr id="7" name="">
             <a:extLst xmlns:a="http://schemas.openxmlformats.org/drawingml/2006/main">
               <a:ext uri="{FF2B5EF4-FFF2-40B4-BE49-F238E27FC236}">
-                <a16:creationId xmlns:a16="http://schemas.microsoft.com/office/drawing/2014/main" id="{F62DB786-3BD2-43C0-9CBC-559528A2C587}"/>
+                <a16:creationId xmlns:a16="http://schemas.microsoft.com/office/drawing/2014/main" id="{FD999EE9-1186-4CC6-A523-AEA6125DF3EB}"/>
               </a:ext>
             </a:extLst>
           </p:cNvPr>
@@ -10355,7 +10555,7 @@
           <p:cNvPr id="8" name="">
             <a:extLst xmlns:a="http://schemas.openxmlformats.org/drawingml/2006/main">
               <a:ext uri="{FF2B5EF4-FFF2-40B4-BE49-F238E27FC236}">
-                <a16:creationId xmlns:a16="http://schemas.microsoft.com/office/drawing/2014/main" id="{FBA2D31A-67E8-4667-8A71-A0F1F37CCC9B}"/>
+                <a16:creationId xmlns:a16="http://schemas.microsoft.com/office/drawing/2014/main" id="{B86C1BAF-0EBC-4599-9D60-572BD0E43FB8}"/>
               </a:ext>
             </a:extLst>
           </p:cNvPr>
@@ -10412,7 +10612,7 @@
           <p:cNvPr id="9" name="">
             <a:extLst xmlns:a="http://schemas.openxmlformats.org/drawingml/2006/main">
               <a:ext uri="{FF2B5EF4-FFF2-40B4-BE49-F238E27FC236}">
-                <a16:creationId xmlns:a16="http://schemas.microsoft.com/office/drawing/2014/main" id="{6B69AC0A-B82F-455C-B85E-E44789F906F0}"/>
+                <a16:creationId xmlns:a16="http://schemas.microsoft.com/office/drawing/2014/main" id="{E41463DA-814A-42FE-A017-BB3E0A9A4A0C}"/>
               </a:ext>
             </a:extLst>
           </p:cNvPr>
@@ -10469,7 +10669,7 @@
           <p:cNvPr id="10" name="">
             <a:extLst xmlns:a="http://schemas.openxmlformats.org/drawingml/2006/main">
               <a:ext uri="{FF2B5EF4-FFF2-40B4-BE49-F238E27FC236}">
-                <a16:creationId xmlns:a16="http://schemas.microsoft.com/office/drawing/2014/main" id="{7C30021D-8497-4C9F-A5E5-73FC7C66CAF6}"/>
+                <a16:creationId xmlns:a16="http://schemas.microsoft.com/office/drawing/2014/main" id="{183B2432-94D0-4EAD-A77F-22F133007E18}"/>
               </a:ext>
             </a:extLst>
           </p:cNvPr>
@@ -10526,7 +10726,7 @@
           <p:cNvPr id="11" name="">
             <a:extLst xmlns:a="http://schemas.openxmlformats.org/drawingml/2006/main">
               <a:ext uri="{FF2B5EF4-FFF2-40B4-BE49-F238E27FC236}">
-                <a16:creationId xmlns:a16="http://schemas.microsoft.com/office/drawing/2014/main" id="{3DCC1CCA-8AF9-4762-A66F-E4E7CB5DFBA2}"/>
+                <a16:creationId xmlns:a16="http://schemas.microsoft.com/office/drawing/2014/main" id="{1487C46B-4995-4630-AFB5-FD5752BDFE54}"/>
               </a:ext>
             </a:extLst>
           </p:cNvPr>
@@ -10583,7 +10783,7 @@
           <p:cNvPr id="12" name="">
             <a:extLst xmlns:a="http://schemas.openxmlformats.org/drawingml/2006/main">
               <a:ext uri="{FF2B5EF4-FFF2-40B4-BE49-F238E27FC236}">
-                <a16:creationId xmlns:a16="http://schemas.microsoft.com/office/drawing/2014/main" id="{A029757A-6D48-45CA-AD87-C1FDCEA8F3B4}"/>
+                <a16:creationId xmlns:a16="http://schemas.microsoft.com/office/drawing/2014/main" id="{0DCA8867-E7E0-4332-A6ED-D13B2CE46904}"/>
               </a:ext>
             </a:extLst>
           </p:cNvPr>
@@ -10640,7 +10840,7 @@
           <p:cNvPr id="13" name="">
             <a:extLst xmlns:a="http://schemas.openxmlformats.org/drawingml/2006/main">
               <a:ext uri="{FF2B5EF4-FFF2-40B4-BE49-F238E27FC236}">
-                <a16:creationId xmlns:a16="http://schemas.microsoft.com/office/drawing/2014/main" id="{5E445E06-9B6E-4365-AE0B-4D03ED66EBB7}"/>
+                <a16:creationId xmlns:a16="http://schemas.microsoft.com/office/drawing/2014/main" id="{26A94026-2CF8-4844-8E4F-2400D766FE89}"/>
               </a:ext>
             </a:extLst>
           </p:cNvPr>
@@ -10697,7 +10897,7 @@
           <p:cNvPr id="14" name="">
             <a:extLst xmlns:a="http://schemas.openxmlformats.org/drawingml/2006/main">
               <a:ext uri="{FF2B5EF4-FFF2-40B4-BE49-F238E27FC236}">
-                <a16:creationId xmlns:a16="http://schemas.microsoft.com/office/drawing/2014/main" id="{B6801E23-DE04-45D2-A20A-023AAAFCEBAB}"/>
+                <a16:creationId xmlns:a16="http://schemas.microsoft.com/office/drawing/2014/main" id="{A4557404-17FC-4D91-86B4-7C2819E3252B}"/>
               </a:ext>
             </a:extLst>
           </p:cNvPr>
@@ -10754,7 +10954,7 @@
           <p:cNvPr id="15" name="">
             <a:extLst xmlns:a="http://schemas.openxmlformats.org/drawingml/2006/main">
               <a:ext uri="{FF2B5EF4-FFF2-40B4-BE49-F238E27FC236}">
-                <a16:creationId xmlns:a16="http://schemas.microsoft.com/office/drawing/2014/main" id="{0419CAC4-EA67-4916-A815-1438CBE8927E}"/>
+                <a16:creationId xmlns:a16="http://schemas.microsoft.com/office/drawing/2014/main" id="{79C5138C-50ED-4D76-BC4D-7B3D8AA2DC09}"/>
               </a:ext>
             </a:extLst>
           </p:cNvPr>
@@ -10809,7 +11009,7 @@
     </p:spTree>
     <p:extLst>
       <p:ext uri="{BB962C8B-B14F-4D97-AF65-F5344CB8AC3E}">
-        <p14:creationId xmlns:p14="http://schemas.microsoft.com/office/powerpoint/2010/main" val="1494402040"/>
+        <p14:creationId xmlns:p14="http://schemas.microsoft.com/office/powerpoint/2010/main" val="845924554"/>
       </p:ext>
     </p:extLst>
   </p:cSld>
@@ -10964,7 +11164,7 @@
           <p:cNvPr id="16" name="">
             <a:extLst xmlns:a="http://schemas.openxmlformats.org/drawingml/2006/main">
               <a:ext uri="{FF2B5EF4-FFF2-40B4-BE49-F238E27FC236}">
-                <a16:creationId xmlns:a16="http://schemas.microsoft.com/office/drawing/2014/main" id="{B578EF02-9BF7-430E-AC33-F2320FEB61C8}"/>
+                <a16:creationId xmlns:a16="http://schemas.microsoft.com/office/drawing/2014/main" id="{B36875C3-B088-4950-A46C-68A2C7B660E2}"/>
               </a:ext>
             </a:extLst>
           </p:cNvPr>
@@ -10996,7 +11196,7 @@
           <p:cNvPr id="2" name="">
             <a:extLst xmlns:a="http://schemas.openxmlformats.org/drawingml/2006/main">
               <a:ext uri="{FF2B5EF4-FFF2-40B4-BE49-F238E27FC236}">
-                <a16:creationId xmlns:a16="http://schemas.microsoft.com/office/drawing/2014/main" id="{935E6C4A-61FB-4D50-9017-2A3FFC95906C}"/>
+                <a16:creationId xmlns:a16="http://schemas.microsoft.com/office/drawing/2014/main" id="{427420AE-B80B-4694-BE91-F59DB2564C83}"/>
               </a:ext>
             </a:extLst>
           </p:cNvPr>
@@ -11053,7 +11253,7 @@
           <p:cNvPr id="3" name="">
             <a:extLst xmlns:a="http://schemas.openxmlformats.org/drawingml/2006/main">
               <a:ext uri="{FF2B5EF4-FFF2-40B4-BE49-F238E27FC236}">
-                <a16:creationId xmlns:a16="http://schemas.microsoft.com/office/drawing/2014/main" id="{4BD661AE-E35F-4216-AEE2-E334CDFF2114}"/>
+                <a16:creationId xmlns:a16="http://schemas.microsoft.com/office/drawing/2014/main" id="{9501CD7C-55B9-43E7-850B-5F949FBE47EB}"/>
               </a:ext>
             </a:extLst>
           </p:cNvPr>
@@ -11085,7 +11285,7 @@
           <p:cNvPr id="4" name="">
             <a:extLst xmlns:a="http://schemas.openxmlformats.org/drawingml/2006/main">
               <a:ext uri="{FF2B5EF4-FFF2-40B4-BE49-F238E27FC236}">
-                <a16:creationId xmlns:a16="http://schemas.microsoft.com/office/drawing/2014/main" id="{AF9A11B9-C640-4806-91DA-7A462F648B90}"/>
+                <a16:creationId xmlns:a16="http://schemas.microsoft.com/office/drawing/2014/main" id="{9C237F36-FF84-414B-8550-34805146C528}"/>
               </a:ext>
             </a:extLst>
           </p:cNvPr>
@@ -11142,7 +11342,7 @@
           <p:cNvPr id="5" name="">
             <a:extLst xmlns:a="http://schemas.openxmlformats.org/drawingml/2006/main">
               <a:ext uri="{FF2B5EF4-FFF2-40B4-BE49-F238E27FC236}">
-                <a16:creationId xmlns:a16="http://schemas.microsoft.com/office/drawing/2014/main" id="{65AC4733-D071-407F-968D-819E3EE4999B}"/>
+                <a16:creationId xmlns:a16="http://schemas.microsoft.com/office/drawing/2014/main" id="{EA32CFBC-BABA-426D-A273-F47EA5FA92B3}"/>
               </a:ext>
             </a:extLst>
           </p:cNvPr>
@@ -11199,7 +11399,7 @@
           <p:cNvPr id="6" name="">
             <a:extLst xmlns:a="http://schemas.openxmlformats.org/drawingml/2006/main">
               <a:ext uri="{FF2B5EF4-FFF2-40B4-BE49-F238E27FC236}">
-                <a16:creationId xmlns:a16="http://schemas.microsoft.com/office/drawing/2014/main" id="{3D0A2895-39B1-428E-8B3F-29D356F69D9D}"/>
+                <a16:creationId xmlns:a16="http://schemas.microsoft.com/office/drawing/2014/main" id="{280AB91C-BC86-4EB6-96E0-B945ED709AA3}"/>
               </a:ext>
             </a:extLst>
           </p:cNvPr>
@@ -11256,7 +11456,7 @@
           <p:cNvPr id="7" name="">
             <a:extLst xmlns:a="http://schemas.openxmlformats.org/drawingml/2006/main">
               <a:ext uri="{FF2B5EF4-FFF2-40B4-BE49-F238E27FC236}">
-                <a16:creationId xmlns:a16="http://schemas.microsoft.com/office/drawing/2014/main" id="{638F502E-1F18-44AC-BDAC-354D01AC9FBB}"/>
+                <a16:creationId xmlns:a16="http://schemas.microsoft.com/office/drawing/2014/main" id="{4CBCE6F6-B4F6-45FE-A028-D19B689C61E3}"/>
               </a:ext>
             </a:extLst>
           </p:cNvPr>
@@ -11288,7 +11488,7 @@
           <p:cNvPr id="8" name="">
             <a:extLst xmlns:a="http://schemas.openxmlformats.org/drawingml/2006/main">
               <a:ext uri="{FF2B5EF4-FFF2-40B4-BE49-F238E27FC236}">
-                <a16:creationId xmlns:a16="http://schemas.microsoft.com/office/drawing/2014/main" id="{95CAA759-7EED-432E-9760-132092CD0ED9}"/>
+                <a16:creationId xmlns:a16="http://schemas.microsoft.com/office/drawing/2014/main" id="{56E482D1-C38B-4A8C-889E-FBFE5CB5A74F}"/>
               </a:ext>
             </a:extLst>
           </p:cNvPr>
@@ -11345,7 +11545,7 @@
           <p:cNvPr id="9" name="">
             <a:extLst xmlns:a="http://schemas.openxmlformats.org/drawingml/2006/main">
               <a:ext uri="{FF2B5EF4-FFF2-40B4-BE49-F238E27FC236}">
-                <a16:creationId xmlns:a16="http://schemas.microsoft.com/office/drawing/2014/main" id="{96EF8272-F11A-46F2-BBDB-A4B23C725EE4}"/>
+                <a16:creationId xmlns:a16="http://schemas.microsoft.com/office/drawing/2014/main" id="{230196FF-47E2-4129-8848-3AEF17C4550D}"/>
               </a:ext>
             </a:extLst>
           </p:cNvPr>
@@ -11406,7 +11606,7 @@
           <p:nvPr/>
         </p:nvPicPr>
         <p:blipFill>
-          <a:blip xmlns:r="http://schemas.openxmlformats.org/officeDocument/2006/relationships" xmlns:a="http://schemas.openxmlformats.org/drawingml/2006/main" r:embed="Rb1366afb2f3c4926"/>
+          <a:blip xmlns:r="http://schemas.openxmlformats.org/officeDocument/2006/relationships" xmlns:a="http://schemas.openxmlformats.org/drawingml/2006/main" r:embed="R53c6474d6b124bf5"/>
           <a:stretch xmlns:a="http://schemas.openxmlformats.org/drawingml/2006/main"/>
         </p:blipFill>
         <p:spPr>
@@ -11424,7 +11624,7 @@
           <p:cNvPr id="11" name="">
             <a:extLst xmlns:a="http://schemas.openxmlformats.org/drawingml/2006/main">
               <a:ext uri="{FF2B5EF4-FFF2-40B4-BE49-F238E27FC236}">
-                <a16:creationId xmlns:a16="http://schemas.microsoft.com/office/drawing/2014/main" id="{FD79AC73-32B3-4483-8AB1-95C6D4314C47}"/>
+                <a16:creationId xmlns:a16="http://schemas.microsoft.com/office/drawing/2014/main" id="{444B3683-A84D-4CDD-8839-1D84A238FAC7}"/>
               </a:ext>
             </a:extLst>
           </p:cNvPr>
@@ -11481,7 +11681,7 @@
           <p:cNvPr id="12" name="">
             <a:extLst xmlns:a="http://schemas.openxmlformats.org/drawingml/2006/main">
               <a:ext uri="{FF2B5EF4-FFF2-40B4-BE49-F238E27FC236}">
-                <a16:creationId xmlns:a16="http://schemas.microsoft.com/office/drawing/2014/main" id="{4CBDA9D0-6085-4FA1-9BB2-09E9CB936D31}"/>
+                <a16:creationId xmlns:a16="http://schemas.microsoft.com/office/drawing/2014/main" id="{90A0A031-F94C-4C12-8D85-4B0ECBF93DE4}"/>
               </a:ext>
             </a:extLst>
           </p:cNvPr>
@@ -11538,7 +11738,7 @@
           <p:cNvPr id="13" name="">
             <a:extLst xmlns:a="http://schemas.openxmlformats.org/drawingml/2006/main">
               <a:ext uri="{FF2B5EF4-FFF2-40B4-BE49-F238E27FC236}">
-                <a16:creationId xmlns:a16="http://schemas.microsoft.com/office/drawing/2014/main" id="{8257A30D-4A18-46DB-AB68-CF9FF8958072}"/>
+                <a16:creationId xmlns:a16="http://schemas.microsoft.com/office/drawing/2014/main" id="{F6E2214A-7AF0-4095-B66C-C698929403FD}"/>
               </a:ext>
             </a:extLst>
           </p:cNvPr>
@@ -11570,7 +11770,7 @@
           <p:cNvPr id="14" name="">
             <a:extLst xmlns:a="http://schemas.openxmlformats.org/drawingml/2006/main">
               <a:ext uri="{FF2B5EF4-FFF2-40B4-BE49-F238E27FC236}">
-                <a16:creationId xmlns:a16="http://schemas.microsoft.com/office/drawing/2014/main" id="{AFACE744-4C5B-4872-8413-852EB6CCD9EF}"/>
+                <a16:creationId xmlns:a16="http://schemas.microsoft.com/office/drawing/2014/main" id="{4F6083BE-B78D-4858-9D34-61918711FE41}"/>
               </a:ext>
             </a:extLst>
           </p:cNvPr>
@@ -11627,7 +11827,7 @@
           <p:cNvPr id="15" name="">
             <a:extLst xmlns:a="http://schemas.openxmlformats.org/drawingml/2006/main">
               <a:ext uri="{FF2B5EF4-FFF2-40B4-BE49-F238E27FC236}">
-                <a16:creationId xmlns:a16="http://schemas.microsoft.com/office/drawing/2014/main" id="{E3317C39-99EF-4D18-9130-BA0CE7B33579}"/>
+                <a16:creationId xmlns:a16="http://schemas.microsoft.com/office/drawing/2014/main" id="{E2A23BE4-9B6B-4406-96CC-F042A427D729}"/>
               </a:ext>
             </a:extLst>
           </p:cNvPr>
@@ -11682,7 +11882,7 @@
     </p:spTree>
     <p:extLst>
       <p:ext uri="{BB962C8B-B14F-4D97-AF65-F5344CB8AC3E}">
-        <p14:creationId xmlns:p14="http://schemas.microsoft.com/office/powerpoint/2010/main" val="1062293967"/>
+        <p14:creationId xmlns:p14="http://schemas.microsoft.com/office/powerpoint/2010/main" val="1917879224"/>
       </p:ext>
     </p:extLst>
   </p:cSld>
@@ -11837,7 +12037,7 @@
           <p:cNvPr id="23" name="">
             <a:extLst xmlns:a="http://schemas.openxmlformats.org/drawingml/2006/main">
               <a:ext uri="{FF2B5EF4-FFF2-40B4-BE49-F238E27FC236}">
-                <a16:creationId xmlns:a16="http://schemas.microsoft.com/office/drawing/2014/main" id="{3858C091-2053-44C4-8009-599B7844FA15}"/>
+                <a16:creationId xmlns:a16="http://schemas.microsoft.com/office/drawing/2014/main" id="{B4FCD112-A1D4-49F2-A050-6E2E8AB7659D}"/>
               </a:ext>
             </a:extLst>
           </p:cNvPr>
@@ -11869,7 +12069,7 @@
           <p:cNvPr id="2" name="">
             <a:extLst xmlns:a="http://schemas.openxmlformats.org/drawingml/2006/main">
               <a:ext uri="{FF2B5EF4-FFF2-40B4-BE49-F238E27FC236}">
-                <a16:creationId xmlns:a16="http://schemas.microsoft.com/office/drawing/2014/main" id="{8C812B8A-3061-4DA6-BCF4-51C244CD8287}"/>
+                <a16:creationId xmlns:a16="http://schemas.microsoft.com/office/drawing/2014/main" id="{1105ED88-8700-4EE7-9255-08B81B6F4BDD}"/>
               </a:ext>
             </a:extLst>
           </p:cNvPr>
@@ -11926,7 +12126,7 @@
           <p:cNvPr id="3" name="">
             <a:extLst xmlns:a="http://schemas.openxmlformats.org/drawingml/2006/main">
               <a:ext uri="{FF2B5EF4-FFF2-40B4-BE49-F238E27FC236}">
-                <a16:creationId xmlns:a16="http://schemas.microsoft.com/office/drawing/2014/main" id="{B3C09E05-C4ED-4C60-BF78-0EF5A392D339}"/>
+                <a16:creationId xmlns:a16="http://schemas.microsoft.com/office/drawing/2014/main" id="{C646CC47-1569-45E1-BB84-1FB8944DB341}"/>
               </a:ext>
             </a:extLst>
           </p:cNvPr>
@@ -11958,7 +12158,7 @@
           <p:cNvPr id="4" name="">
             <a:extLst xmlns:a="http://schemas.openxmlformats.org/drawingml/2006/main">
               <a:ext uri="{FF2B5EF4-FFF2-40B4-BE49-F238E27FC236}">
-                <a16:creationId xmlns:a16="http://schemas.microsoft.com/office/drawing/2014/main" id="{45C456B0-A628-4C77-A879-21F1697D931B}"/>
+                <a16:creationId xmlns:a16="http://schemas.microsoft.com/office/drawing/2014/main" id="{008C54DF-17F3-4293-B614-D272ADFACFA0}"/>
               </a:ext>
             </a:extLst>
           </p:cNvPr>
@@ -12015,7 +12215,7 @@
           <p:cNvPr id="5" name="">
             <a:extLst xmlns:a="http://schemas.openxmlformats.org/drawingml/2006/main">
               <a:ext uri="{FF2B5EF4-FFF2-40B4-BE49-F238E27FC236}">
-                <a16:creationId xmlns:a16="http://schemas.microsoft.com/office/drawing/2014/main" id="{8809FB60-7E79-4FA0-B929-E7AAF10D0286}"/>
+                <a16:creationId xmlns:a16="http://schemas.microsoft.com/office/drawing/2014/main" id="{FFD6AAF0-DBD1-4667-B9B3-53E05340C67D}"/>
               </a:ext>
             </a:extLst>
           </p:cNvPr>
@@ -12072,7 +12272,7 @@
           <p:cNvPr id="6" name="">
             <a:extLst xmlns:a="http://schemas.openxmlformats.org/drawingml/2006/main">
               <a:ext uri="{FF2B5EF4-FFF2-40B4-BE49-F238E27FC236}">
-                <a16:creationId xmlns:a16="http://schemas.microsoft.com/office/drawing/2014/main" id="{7842594F-DD29-44B0-B82E-6E2A8E0088C6}"/>
+                <a16:creationId xmlns:a16="http://schemas.microsoft.com/office/drawing/2014/main" id="{792542E6-0917-4C66-8C0F-0AB610CFFEAD}"/>
               </a:ext>
             </a:extLst>
           </p:cNvPr>
@@ -12129,7 +12329,7 @@
           <p:cNvPr id="7" name="">
             <a:extLst xmlns:a="http://schemas.openxmlformats.org/drawingml/2006/main">
               <a:ext uri="{FF2B5EF4-FFF2-40B4-BE49-F238E27FC236}">
-                <a16:creationId xmlns:a16="http://schemas.microsoft.com/office/drawing/2014/main" id="{A65AA6FF-16AD-4903-B989-7F92FA7ECF82}"/>
+                <a16:creationId xmlns:a16="http://schemas.microsoft.com/office/drawing/2014/main" id="{A7609AC3-F9BA-4E49-A772-A6DCA8C0A3E1}"/>
               </a:ext>
             </a:extLst>
           </p:cNvPr>
@@ -12161,7 +12361,7 @@
           <p:cNvPr id="8" name="">
             <a:extLst xmlns:a="http://schemas.openxmlformats.org/drawingml/2006/main">
               <a:ext uri="{FF2B5EF4-FFF2-40B4-BE49-F238E27FC236}">
-                <a16:creationId xmlns:a16="http://schemas.microsoft.com/office/drawing/2014/main" id="{3FF85248-2602-41A5-8CF1-960D7ACE9478}"/>
+                <a16:creationId xmlns:a16="http://schemas.microsoft.com/office/drawing/2014/main" id="{53B785CA-1CDD-4C80-B9CC-57606C6A25EF}"/>
               </a:ext>
             </a:extLst>
           </p:cNvPr>
@@ -12218,7 +12418,7 @@
           <p:cNvPr id="9" name="">
             <a:extLst xmlns:a="http://schemas.openxmlformats.org/drawingml/2006/main">
               <a:ext uri="{FF2B5EF4-FFF2-40B4-BE49-F238E27FC236}">
-                <a16:creationId xmlns:a16="http://schemas.microsoft.com/office/drawing/2014/main" id="{1C3DE918-0B8C-47E3-BDF0-3162016B3549}"/>
+                <a16:creationId xmlns:a16="http://schemas.microsoft.com/office/drawing/2014/main" id="{0133AFB8-B0DB-4DF0-B3AB-FEAAA5812E7D}"/>
               </a:ext>
             </a:extLst>
           </p:cNvPr>
@@ -12275,7 +12475,7 @@
           <p:cNvPr id="10" name="">
             <a:extLst xmlns:a="http://schemas.openxmlformats.org/drawingml/2006/main">
               <a:ext uri="{FF2B5EF4-FFF2-40B4-BE49-F238E27FC236}">
-                <a16:creationId xmlns:a16="http://schemas.microsoft.com/office/drawing/2014/main" id="{C99B0258-44B2-4D3A-996D-B8C462AF6A8B}"/>
+                <a16:creationId xmlns:a16="http://schemas.microsoft.com/office/drawing/2014/main" id="{D27ED212-E2F1-41DB-AEE5-0D16417AC43C}"/>
               </a:ext>
             </a:extLst>
           </p:cNvPr>
@@ -12309,7 +12509,7 @@
           <p:cNvPr id="11" name="">
             <a:extLst xmlns:a="http://schemas.openxmlformats.org/drawingml/2006/main">
               <a:ext uri="{FF2B5EF4-FFF2-40B4-BE49-F238E27FC236}">
-                <a16:creationId xmlns:a16="http://schemas.microsoft.com/office/drawing/2014/main" id="{D333AB3C-5B48-4ED7-B365-33DDCE07AB44}"/>
+                <a16:creationId xmlns:a16="http://schemas.microsoft.com/office/drawing/2014/main" id="{EC7554F8-CEE0-4A5C-B709-103FE57B935D}"/>
               </a:ext>
             </a:extLst>
           </p:cNvPr>
@@ -12341,7 +12541,7 @@
           <p:cNvPr id="12" name="">
             <a:extLst xmlns:a="http://schemas.openxmlformats.org/drawingml/2006/main">
               <a:ext uri="{FF2B5EF4-FFF2-40B4-BE49-F238E27FC236}">
-                <a16:creationId xmlns:a16="http://schemas.microsoft.com/office/drawing/2014/main" id="{7C6F671A-7AF3-4E0C-82E6-E9C0BE1F1CC6}"/>
+                <a16:creationId xmlns:a16="http://schemas.microsoft.com/office/drawing/2014/main" id="{BB7251C2-2136-4F5F-93AC-222357D01B18}"/>
               </a:ext>
             </a:extLst>
           </p:cNvPr>
@@ -12398,7 +12598,7 @@
           <p:cNvPr id="13" name="">
             <a:extLst xmlns:a="http://schemas.openxmlformats.org/drawingml/2006/main">
               <a:ext uri="{FF2B5EF4-FFF2-40B4-BE49-F238E27FC236}">
-                <a16:creationId xmlns:a16="http://schemas.microsoft.com/office/drawing/2014/main" id="{88FD7F41-ABF7-42C9-A6C0-5BB120A5C228}"/>
+                <a16:creationId xmlns:a16="http://schemas.microsoft.com/office/drawing/2014/main" id="{68F31992-BDB8-4277-AD24-112844F56083}"/>
               </a:ext>
             </a:extLst>
           </p:cNvPr>
@@ -12455,7 +12655,7 @@
           <p:cNvPr id="14" name="">
             <a:extLst xmlns:a="http://schemas.openxmlformats.org/drawingml/2006/main">
               <a:ext uri="{FF2B5EF4-FFF2-40B4-BE49-F238E27FC236}">
-                <a16:creationId xmlns:a16="http://schemas.microsoft.com/office/drawing/2014/main" id="{9818D4F2-447A-466D-99BA-14E381E1B3C8}"/>
+                <a16:creationId xmlns:a16="http://schemas.microsoft.com/office/drawing/2014/main" id="{AFC9F273-0428-4938-BE9D-0160D63983FE}"/>
               </a:ext>
             </a:extLst>
           </p:cNvPr>
@@ -12489,7 +12689,7 @@
           <p:cNvPr id="15" name="">
             <a:extLst xmlns:a="http://schemas.openxmlformats.org/drawingml/2006/main">
               <a:ext uri="{FF2B5EF4-FFF2-40B4-BE49-F238E27FC236}">
-                <a16:creationId xmlns:a16="http://schemas.microsoft.com/office/drawing/2014/main" id="{8E15C96B-CABD-4704-9B4D-3B4054815207}"/>
+                <a16:creationId xmlns:a16="http://schemas.microsoft.com/office/drawing/2014/main" id="{3FE06187-03E6-40E8-B0F2-BDC2F64EF8A0}"/>
               </a:ext>
             </a:extLst>
           </p:cNvPr>
@@ -12521,7 +12721,7 @@
           <p:cNvPr id="16" name="">
             <a:extLst xmlns:a="http://schemas.openxmlformats.org/drawingml/2006/main">
               <a:ext uri="{FF2B5EF4-FFF2-40B4-BE49-F238E27FC236}">
-                <a16:creationId xmlns:a16="http://schemas.microsoft.com/office/drawing/2014/main" id="{A6998870-9028-419C-988B-CC96DF08F257}"/>
+                <a16:creationId xmlns:a16="http://schemas.microsoft.com/office/drawing/2014/main" id="{8651D32B-55F6-4036-BE7E-B70018AC4FF8}"/>
               </a:ext>
             </a:extLst>
           </p:cNvPr>
@@ -12578,7 +12778,7 @@
           <p:cNvPr id="17" name="">
             <a:extLst xmlns:a="http://schemas.openxmlformats.org/drawingml/2006/main">
               <a:ext uri="{FF2B5EF4-FFF2-40B4-BE49-F238E27FC236}">
-                <a16:creationId xmlns:a16="http://schemas.microsoft.com/office/drawing/2014/main" id="{2ABD71BA-2787-4188-A817-2A93AC21D655}"/>
+                <a16:creationId xmlns:a16="http://schemas.microsoft.com/office/drawing/2014/main" id="{BD42F089-7D26-490A-81A7-BA40A7CFCFE6}"/>
               </a:ext>
             </a:extLst>
           </p:cNvPr>
@@ -12635,7 +12835,7 @@
           <p:cNvPr id="18" name="">
             <a:extLst xmlns:a="http://schemas.openxmlformats.org/drawingml/2006/main">
               <a:ext uri="{FF2B5EF4-FFF2-40B4-BE49-F238E27FC236}">
-                <a16:creationId xmlns:a16="http://schemas.microsoft.com/office/drawing/2014/main" id="{98349342-F223-4CB0-9F4F-B140EF485C61}"/>
+                <a16:creationId xmlns:a16="http://schemas.microsoft.com/office/drawing/2014/main" id="{50F8A5BF-EA4F-4F9D-9879-9C5DA4551192}"/>
               </a:ext>
             </a:extLst>
           </p:cNvPr>
@@ -12669,7 +12869,7 @@
           <p:cNvPr id="19" name="">
             <a:extLst xmlns:a="http://schemas.openxmlformats.org/drawingml/2006/main">
               <a:ext uri="{FF2B5EF4-FFF2-40B4-BE49-F238E27FC236}">
-                <a16:creationId xmlns:a16="http://schemas.microsoft.com/office/drawing/2014/main" id="{8C3F2737-FA9F-4CC5-9E7E-57992F8F9EC8}"/>
+                <a16:creationId xmlns:a16="http://schemas.microsoft.com/office/drawing/2014/main" id="{E9DC2301-9F57-4442-AB2A-6F6F1EBE6632}"/>
               </a:ext>
             </a:extLst>
           </p:cNvPr>
@@ -12701,7 +12901,7 @@
           <p:cNvPr id="20" name="">
             <a:extLst xmlns:a="http://schemas.openxmlformats.org/drawingml/2006/main">
               <a:ext uri="{FF2B5EF4-FFF2-40B4-BE49-F238E27FC236}">
-                <a16:creationId xmlns:a16="http://schemas.microsoft.com/office/drawing/2014/main" id="{2DCE3AEB-B0FF-4464-84F7-1226853E9095}"/>
+                <a16:creationId xmlns:a16="http://schemas.microsoft.com/office/drawing/2014/main" id="{053318F3-D956-4BA2-B450-83FE940F5591}"/>
               </a:ext>
             </a:extLst>
           </p:cNvPr>
@@ -12758,7 +12958,7 @@
           <p:cNvPr id="21" name="">
             <a:extLst xmlns:a="http://schemas.openxmlformats.org/drawingml/2006/main">
               <a:ext uri="{FF2B5EF4-FFF2-40B4-BE49-F238E27FC236}">
-                <a16:creationId xmlns:a16="http://schemas.microsoft.com/office/drawing/2014/main" id="{9B45C0FE-E430-4E69-8D8B-88A976061844}"/>
+                <a16:creationId xmlns:a16="http://schemas.microsoft.com/office/drawing/2014/main" id="{A6C07DD5-C9C8-4C01-A491-E50797A59FD1}"/>
               </a:ext>
             </a:extLst>
           </p:cNvPr>
@@ -12815,7 +13015,7 @@
           <p:cNvPr id="22" name="">
             <a:extLst xmlns:a="http://schemas.openxmlformats.org/drawingml/2006/main">
               <a:ext uri="{FF2B5EF4-FFF2-40B4-BE49-F238E27FC236}">
-                <a16:creationId xmlns:a16="http://schemas.microsoft.com/office/drawing/2014/main" id="{3BF7F54A-5DF0-4CD5-9483-5CD012A814C5}"/>
+                <a16:creationId xmlns:a16="http://schemas.microsoft.com/office/drawing/2014/main" id="{884C9238-C2F6-429B-B6DC-B9144433E6CB}"/>
               </a:ext>
             </a:extLst>
           </p:cNvPr>
@@ -12870,7 +13070,7 @@
     </p:spTree>
     <p:extLst>
       <p:ext uri="{BB962C8B-B14F-4D97-AF65-F5344CB8AC3E}">
-        <p14:creationId xmlns:p14="http://schemas.microsoft.com/office/powerpoint/2010/main" val="542337675"/>
+        <p14:creationId xmlns:p14="http://schemas.microsoft.com/office/powerpoint/2010/main" val="575231940"/>
       </p:ext>
     </p:extLst>
   </p:cSld>
@@ -13071,7 +13271,7 @@
           <p:cNvPr id="22" name="">
             <a:extLst xmlns:a="http://schemas.openxmlformats.org/drawingml/2006/main">
               <a:ext uri="{FF2B5EF4-FFF2-40B4-BE49-F238E27FC236}">
-                <a16:creationId xmlns:a16="http://schemas.microsoft.com/office/drawing/2014/main" id="{D0D0527E-A40E-4F1B-8070-DDA7596E959D}"/>
+                <a16:creationId xmlns:a16="http://schemas.microsoft.com/office/drawing/2014/main" id="{A66A7245-8986-41D4-A08A-93DE6AECB657}"/>
               </a:ext>
             </a:extLst>
           </p:cNvPr>
@@ -13103,7 +13303,7 @@
           <p:cNvPr id="2" name="">
             <a:extLst xmlns:a="http://schemas.openxmlformats.org/drawingml/2006/main">
               <a:ext uri="{FF2B5EF4-FFF2-40B4-BE49-F238E27FC236}">
-                <a16:creationId xmlns:a16="http://schemas.microsoft.com/office/drawing/2014/main" id="{B110AAAC-CDBA-4249-8882-5E54E1DAFF03}"/>
+                <a16:creationId xmlns:a16="http://schemas.microsoft.com/office/drawing/2014/main" id="{89AB3F83-0C13-42E3-B78C-F56D464AC4C9}"/>
               </a:ext>
             </a:extLst>
           </p:cNvPr>
@@ -13160,7 +13360,7 @@
           <p:cNvPr id="3" name="">
             <a:extLst xmlns:a="http://schemas.openxmlformats.org/drawingml/2006/main">
               <a:ext uri="{FF2B5EF4-FFF2-40B4-BE49-F238E27FC236}">
-                <a16:creationId xmlns:a16="http://schemas.microsoft.com/office/drawing/2014/main" id="{7131283E-146E-42F9-B707-BF2C8D19BAF6}"/>
+                <a16:creationId xmlns:a16="http://schemas.microsoft.com/office/drawing/2014/main" id="{9B180BCB-A021-4EA3-9D09-A195E55AD37C}"/>
               </a:ext>
             </a:extLst>
           </p:cNvPr>
@@ -13192,7 +13392,7 @@
           <p:cNvPr id="4" name="">
             <a:extLst xmlns:a="http://schemas.openxmlformats.org/drawingml/2006/main">
               <a:ext uri="{FF2B5EF4-FFF2-40B4-BE49-F238E27FC236}">
-                <a16:creationId xmlns:a16="http://schemas.microsoft.com/office/drawing/2014/main" id="{355C752F-9ED2-48EF-9E20-2FC41107807B}"/>
+                <a16:creationId xmlns:a16="http://schemas.microsoft.com/office/drawing/2014/main" id="{63802C6B-94EA-4077-B8A6-77C298186E57}"/>
               </a:ext>
             </a:extLst>
           </p:cNvPr>
@@ -13249,7 +13449,7 @@
           <p:cNvPr id="5" name="">
             <a:extLst xmlns:a="http://schemas.openxmlformats.org/drawingml/2006/main">
               <a:ext uri="{FF2B5EF4-FFF2-40B4-BE49-F238E27FC236}">
-                <a16:creationId xmlns:a16="http://schemas.microsoft.com/office/drawing/2014/main" id="{CCCCBF05-11A7-4143-9E26-859516FB0FAA}"/>
+                <a16:creationId xmlns:a16="http://schemas.microsoft.com/office/drawing/2014/main" id="{617A7DE3-B8AF-46F0-BEC0-250AD5FCEA7D}"/>
               </a:ext>
             </a:extLst>
           </p:cNvPr>
@@ -13306,7 +13506,7 @@
           <p:cNvPr id="6" name="">
             <a:extLst xmlns:a="http://schemas.openxmlformats.org/drawingml/2006/main">
               <a:ext uri="{FF2B5EF4-FFF2-40B4-BE49-F238E27FC236}">
-                <a16:creationId xmlns:a16="http://schemas.microsoft.com/office/drawing/2014/main" id="{374ABB0F-8A3B-4A90-B452-50F1F7352302}"/>
+                <a16:creationId xmlns:a16="http://schemas.microsoft.com/office/drawing/2014/main" id="{6D18EF95-5D7F-43E6-86ED-C79E396B069B}"/>
               </a:ext>
             </a:extLst>
           </p:cNvPr>
@@ -13363,7 +13563,7 @@
           <p:cNvPr id="7" name="">
             <a:extLst xmlns:a="http://schemas.openxmlformats.org/drawingml/2006/main">
               <a:ext uri="{FF2B5EF4-FFF2-40B4-BE49-F238E27FC236}">
-                <a16:creationId xmlns:a16="http://schemas.microsoft.com/office/drawing/2014/main" id="{A252CD5A-DFD6-424D-B5B8-0A95B5DAC780}"/>
+                <a16:creationId xmlns:a16="http://schemas.microsoft.com/office/drawing/2014/main" id="{885E10A9-B2A5-4E65-9DAE-2D6AC96F910E}"/>
               </a:ext>
             </a:extLst>
           </p:cNvPr>
@@ -13395,7 +13595,7 @@
           <p:cNvPr id="8" name="">
             <a:extLst xmlns:a="http://schemas.openxmlformats.org/drawingml/2006/main">
               <a:ext uri="{FF2B5EF4-FFF2-40B4-BE49-F238E27FC236}">
-                <a16:creationId xmlns:a16="http://schemas.microsoft.com/office/drawing/2014/main" id="{66AE92E4-31F9-423B-91D8-A3476EFA6707}"/>
+                <a16:creationId xmlns:a16="http://schemas.microsoft.com/office/drawing/2014/main" id="{3B9EFFCF-276F-4DCB-9ECE-46F366911CA3}"/>
               </a:ext>
             </a:extLst>
           </p:cNvPr>
@@ -13452,7 +13652,7 @@
           <p:cNvPr id="9" name="">
             <a:extLst xmlns:a="http://schemas.openxmlformats.org/drawingml/2006/main">
               <a:ext uri="{FF2B5EF4-FFF2-40B4-BE49-F238E27FC236}">
-                <a16:creationId xmlns:a16="http://schemas.microsoft.com/office/drawing/2014/main" id="{0939E643-5349-4F01-B251-BCC719BACAB4}"/>
+                <a16:creationId xmlns:a16="http://schemas.microsoft.com/office/drawing/2014/main" id="{E3C9BFFE-AA33-4062-9984-1B9DB47159C3}"/>
               </a:ext>
             </a:extLst>
           </p:cNvPr>
@@ -13509,7 +13709,7 @@
           <p:cNvPr id="10" name="">
             <a:extLst xmlns:a="http://schemas.openxmlformats.org/drawingml/2006/main">
               <a:ext uri="{FF2B5EF4-FFF2-40B4-BE49-F238E27FC236}">
-                <a16:creationId xmlns:a16="http://schemas.microsoft.com/office/drawing/2014/main" id="{3E906021-9CD8-4604-8E75-679FC25224E2}"/>
+                <a16:creationId xmlns:a16="http://schemas.microsoft.com/office/drawing/2014/main" id="{CF6D2CB5-9278-497C-9237-8D708FEB23B1}"/>
               </a:ext>
             </a:extLst>
           </p:cNvPr>
@@ -13543,7 +13743,7 @@
           <p:cNvPr id="11" name="">
             <a:extLst xmlns:a="http://schemas.openxmlformats.org/drawingml/2006/main">
               <a:ext uri="{FF2B5EF4-FFF2-40B4-BE49-F238E27FC236}">
-                <a16:creationId xmlns:a16="http://schemas.microsoft.com/office/drawing/2014/main" id="{8B88E9C7-B711-4A50-90DB-D8C191CBBED1}"/>
+                <a16:creationId xmlns:a16="http://schemas.microsoft.com/office/drawing/2014/main" id="{6023B3D2-A72D-4832-845E-7D80297CC901}"/>
               </a:ext>
             </a:extLst>
           </p:cNvPr>
@@ -13575,7 +13775,7 @@
           <p:cNvPr id="12" name="">
             <a:extLst xmlns:a="http://schemas.openxmlformats.org/drawingml/2006/main">
               <a:ext uri="{FF2B5EF4-FFF2-40B4-BE49-F238E27FC236}">
-                <a16:creationId xmlns:a16="http://schemas.microsoft.com/office/drawing/2014/main" id="{7F64B6F3-6F47-4F00-BB1A-3C34CD26DED5}"/>
+                <a16:creationId xmlns:a16="http://schemas.microsoft.com/office/drawing/2014/main" id="{FEF60CC4-20C2-47D8-8F27-7292ECFF9C18}"/>
               </a:ext>
             </a:extLst>
           </p:cNvPr>
@@ -13632,7 +13832,7 @@
           <p:cNvPr id="13" name="">
             <a:extLst xmlns:a="http://schemas.openxmlformats.org/drawingml/2006/main">
               <a:ext uri="{FF2B5EF4-FFF2-40B4-BE49-F238E27FC236}">
-                <a16:creationId xmlns:a16="http://schemas.microsoft.com/office/drawing/2014/main" id="{837CB8C1-69F5-48EF-8E6D-772B840CE8DB}"/>
+                <a16:creationId xmlns:a16="http://schemas.microsoft.com/office/drawing/2014/main" id="{C7DF70A8-48C0-442A-8D4E-E83B466857D5}"/>
               </a:ext>
             </a:extLst>
           </p:cNvPr>
@@ -13689,7 +13889,7 @@
           <p:cNvPr id="14" name="">
             <a:extLst xmlns:a="http://schemas.openxmlformats.org/drawingml/2006/main">
               <a:ext uri="{FF2B5EF4-FFF2-40B4-BE49-F238E27FC236}">
-                <a16:creationId xmlns:a16="http://schemas.microsoft.com/office/drawing/2014/main" id="{C8BD5EAE-BB44-4B6F-BCD4-8E13D55C7138}"/>
+                <a16:creationId xmlns:a16="http://schemas.microsoft.com/office/drawing/2014/main" id="{F543007F-6F81-4055-9195-D2C6E46FEB47}"/>
               </a:ext>
             </a:extLst>
           </p:cNvPr>
@@ -13723,7 +13923,7 @@
           <p:cNvPr id="15" name="">
             <a:extLst xmlns:a="http://schemas.openxmlformats.org/drawingml/2006/main">
               <a:ext uri="{FF2B5EF4-FFF2-40B4-BE49-F238E27FC236}">
-                <a16:creationId xmlns:a16="http://schemas.microsoft.com/office/drawing/2014/main" id="{E28FAC1D-B24A-403D-96A9-E262F8FC9874}"/>
+                <a16:creationId xmlns:a16="http://schemas.microsoft.com/office/drawing/2014/main" id="{AA535AE5-B105-4ED5-85EA-18116DC12263}"/>
               </a:ext>
             </a:extLst>
           </p:cNvPr>
@@ -13755,7 +13955,7 @@
           <p:cNvPr id="16" name="">
             <a:extLst xmlns:a="http://schemas.openxmlformats.org/drawingml/2006/main">
               <a:ext uri="{FF2B5EF4-FFF2-40B4-BE49-F238E27FC236}">
-                <a16:creationId xmlns:a16="http://schemas.microsoft.com/office/drawing/2014/main" id="{7D94C5D8-93DE-4E9F-BA5B-BC5563126D05}"/>
+                <a16:creationId xmlns:a16="http://schemas.microsoft.com/office/drawing/2014/main" id="{499864E3-07AF-4727-BA3F-413624B2536B}"/>
               </a:ext>
             </a:extLst>
           </p:cNvPr>
@@ -13812,7 +14012,7 @@
           <p:cNvPr id="17" name="">
             <a:extLst xmlns:a="http://schemas.openxmlformats.org/drawingml/2006/main">
               <a:ext uri="{FF2B5EF4-FFF2-40B4-BE49-F238E27FC236}">
-                <a16:creationId xmlns:a16="http://schemas.microsoft.com/office/drawing/2014/main" id="{04689A9B-F898-472C-B008-EA44CCC7DC54}"/>
+                <a16:creationId xmlns:a16="http://schemas.microsoft.com/office/drawing/2014/main" id="{252BCDB8-853B-4BA0-AE52-3E0C2996FD65}"/>
               </a:ext>
             </a:extLst>
           </p:cNvPr>
@@ -13869,7 +14069,7 @@
           <p:cNvPr id="18" name="">
             <a:extLst xmlns:a="http://schemas.openxmlformats.org/drawingml/2006/main">
               <a:ext uri="{FF2B5EF4-FFF2-40B4-BE49-F238E27FC236}">
-                <a16:creationId xmlns:a16="http://schemas.microsoft.com/office/drawing/2014/main" id="{6D545F4C-8373-404D-81C2-45ED67ED2A1D}"/>
+                <a16:creationId xmlns:a16="http://schemas.microsoft.com/office/drawing/2014/main" id="{E680A187-3C79-47B4-8C27-67BD6960E083}"/>
               </a:ext>
             </a:extLst>
           </p:cNvPr>
@@ -13903,7 +14103,7 @@
           <p:cNvPr id="19" name="">
             <a:extLst xmlns:a="http://schemas.openxmlformats.org/drawingml/2006/main">
               <a:ext uri="{FF2B5EF4-FFF2-40B4-BE49-F238E27FC236}">
-                <a16:creationId xmlns:a16="http://schemas.microsoft.com/office/drawing/2014/main" id="{83A99E5C-0697-405A-BFBB-EA9A4C1F0276}"/>
+                <a16:creationId xmlns:a16="http://schemas.microsoft.com/office/drawing/2014/main" id="{AA176C39-9A78-4287-B4FA-62A2896EC0C5}"/>
               </a:ext>
             </a:extLst>
           </p:cNvPr>
@@ -13935,7 +14135,7 @@
           <p:cNvPr id="20" name="">
             <a:extLst xmlns:a="http://schemas.openxmlformats.org/drawingml/2006/main">
               <a:ext uri="{FF2B5EF4-FFF2-40B4-BE49-F238E27FC236}">
-                <a16:creationId xmlns:a16="http://schemas.microsoft.com/office/drawing/2014/main" id="{3987DB11-C2B4-49A3-9AD8-374D409DD0B4}"/>
+                <a16:creationId xmlns:a16="http://schemas.microsoft.com/office/drawing/2014/main" id="{0DDD7CA0-55EB-4AD4-A1E4-3527562388C5}"/>
               </a:ext>
             </a:extLst>
           </p:cNvPr>
@@ -13992,7 +14192,7 @@
           <p:cNvPr id="21" name="">
             <a:extLst xmlns:a="http://schemas.openxmlformats.org/drawingml/2006/main">
               <a:ext uri="{FF2B5EF4-FFF2-40B4-BE49-F238E27FC236}">
-                <a16:creationId xmlns:a16="http://schemas.microsoft.com/office/drawing/2014/main" id="{0F823F2B-EC6F-4612-81CF-A60AC0F75F41}"/>
+                <a16:creationId xmlns:a16="http://schemas.microsoft.com/office/drawing/2014/main" id="{1575DC92-CEB0-4BB3-ABC4-D434FBF470BD}"/>
               </a:ext>
             </a:extLst>
           </p:cNvPr>
@@ -14047,7 +14247,7 @@
     </p:spTree>
     <p:extLst>
       <p:ext uri="{BB962C8B-B14F-4D97-AF65-F5344CB8AC3E}">
-        <p14:creationId xmlns:p14="http://schemas.microsoft.com/office/powerpoint/2010/main" val="21878076"/>
+        <p14:creationId xmlns:p14="http://schemas.microsoft.com/office/powerpoint/2010/main" val="52603046"/>
       </p:ext>
     </p:extLst>
   </p:cSld>
